--- a/docs/test/stress/m3-challenger-output/a24_overflow_19rows.pptx
+++ b/docs/test/stress/m3-challenger-output/a24_overflow_19rows.pptx
@@ -1016,14 +1016,39 @@
       </p:sp>
       <p:sp>
         <p:nvSpPr>
-          <p:cNvPr id="6" name="Text 4"/>
+          <p:cNvPr id="6" name="Shape 4"/>
           <p:cNvSpPr/>
           <p:nvPr/>
         </p:nvSpPr>
         <p:spPr>
           <a:xfrm>
-            <a:off x="566928" y="5961888"/>
-            <a:ext cx="3108960" cy="182880"/>
+            <a:off x="566928" y="1645920"/>
+            <a:ext cx="2011680" cy="221381"/>
+          </a:xfrm>
+          <a:prstGeom prst="rect">
+            <a:avLst/>
+          </a:prstGeom>
+          <a:solidFill>
+            <a:srgbClr val="10161F"/>
+          </a:solidFill>
+          <a:ln w="6350">
+            <a:solidFill>
+              <a:srgbClr val="10161F"/>
+            </a:solidFill>
+            <a:prstDash val="solid"/>
+          </a:ln>
+        </p:spPr>
+      </p:sp>
+      <p:sp>
+        <p:nvSpPr>
+          <p:cNvPr id="7" name="Text 5"/>
+          <p:cNvSpPr/>
+          <p:nvPr/>
+        </p:nvSpPr>
+        <p:spPr>
+          <a:xfrm>
+            <a:off x="566928" y="1645920"/>
+            <a:ext cx="2011680" cy="221381"/>
           </a:xfrm>
           <a:prstGeom prst="rect">
             <a:avLst/>
@@ -1032,24 +1057,1318 @@
           <a:ln/>
         </p:spPr>
         <p:txBody>
-          <a:bodyPr wrap="square" lIns="0" tIns="0" rIns="0" bIns="0" rtlCol="0" anchor="ctr"/>
+          <a:bodyPr wrap="none" lIns="0" tIns="0" rIns="0" bIns="0" rtlCol="0" anchor="ctr"/>
           <a:lstStyle/>
           <a:p>
-            <a:pPr algn="l" indent="0" marL="0">
+            <a:pPr algn="ctr" indent="0" marL="0">
               <a:buNone/>
             </a:pPr>
             <a:r>
-              <a:rPr lang="en-US" sz="850" dirty="0">
+              <a:rPr lang="en-US" sz="750" b="1" dirty="0">
                 <a:solidFill>
-                  <a:srgbClr val="8A8A8A"/>
+                  <a:srgbClr val="FFFFFF"/>
                 </a:solidFill>
                 <a:latin typeface="맑은 고딕" pitchFamily="34" charset="0"/>
                 <a:ea typeface="맑은 고딕" pitchFamily="34" charset="-122"/>
                 <a:cs typeface="맑은 고딕" pitchFamily="34" charset="-120"/>
               </a:rPr>
-              <a:t>※ 렌트롤 현황 기준 층별 공간 배치도</a:t>
+              <a:t>층별 스태킹 플랜 (㎡)</a:t>
             </a:r>
-            <a:endParaRPr lang="en-US" sz="850" dirty="0"/>
+            <a:endParaRPr lang="en-US" sz="750" dirty="0"/>
+          </a:p>
+        </p:txBody>
+      </p:sp>
+      <p:sp>
+        <p:nvSpPr>
+          <p:cNvPr id="8" name="Text 6"/>
+          <p:cNvSpPr/>
+          <p:nvPr/>
+        </p:nvSpPr>
+        <p:spPr>
+          <a:xfrm>
+            <a:off x="566928" y="5421697"/>
+            <a:ext cx="475488" cy="209082"/>
+          </a:xfrm>
+          <a:prstGeom prst="rect">
+            <a:avLst/>
+          </a:prstGeom>
+          <a:noFill/>
+          <a:ln/>
+        </p:spPr>
+        <p:txBody>
+          <a:bodyPr wrap="none" lIns="0" tIns="0" rIns="0" bIns="0" rtlCol="0" anchor="ctr"/>
+          <a:lstStyle/>
+          <a:p>
+            <a:pPr algn="r" indent="0" marL="0">
+              <a:buNone/>
+            </a:pPr>
+            <a:r>
+              <a:rPr lang="en-US" sz="800" b="1" dirty="0">
+                <a:solidFill>
+                  <a:srgbClr val="10161F"/>
+                </a:solidFill>
+                <a:latin typeface="맑은 고딕" pitchFamily="34" charset="0"/>
+                <a:ea typeface="맑은 고딕" pitchFamily="34" charset="-122"/>
+                <a:cs typeface="맑은 고딕" pitchFamily="34" charset="-120"/>
+              </a:rPr>
+              <a:t>1F</a:t>
+            </a:r>
+            <a:endParaRPr lang="en-US" sz="800" dirty="0"/>
+          </a:p>
+        </p:txBody>
+      </p:sp>
+      <p:sp>
+        <p:nvSpPr>
+          <p:cNvPr id="9" name="Shape 7"/>
+          <p:cNvSpPr/>
+          <p:nvPr/>
+        </p:nvSpPr>
+        <p:spPr>
+          <a:xfrm>
+            <a:off x="1115568" y="5453701"/>
+            <a:ext cx="1444752" cy="145074"/>
+          </a:xfrm>
+          <a:prstGeom prst="rect">
+            <a:avLst/>
+          </a:prstGeom>
+          <a:solidFill>
+            <a:srgbClr val="C5B4E3"/>
+          </a:solidFill>
+          <a:ln w="9525">
+            <a:solidFill>
+              <a:srgbClr val="5B6B73"/>
+            </a:solidFill>
+            <a:prstDash val="solid"/>
+          </a:ln>
+        </p:spPr>
+      </p:sp>
+      <p:sp>
+        <p:nvSpPr>
+          <p:cNvPr id="10" name="Text 8"/>
+          <p:cNvSpPr/>
+          <p:nvPr/>
+        </p:nvSpPr>
+        <p:spPr>
+          <a:xfrm>
+            <a:off x="1143000" y="5453701"/>
+            <a:ext cx="1389888" cy="145074"/>
+          </a:xfrm>
+          <a:prstGeom prst="rect">
+            <a:avLst/>
+          </a:prstGeom>
+          <a:noFill/>
+          <a:ln/>
+        </p:spPr>
+        <p:txBody>
+          <a:bodyPr wrap="none" lIns="0" tIns="0" rIns="0" bIns="0" rtlCol="0" anchor="ctr"/>
+          <a:lstStyle/>
+          <a:p>
+            <a:pPr algn="ctr" indent="0" marL="0">
+              <a:buNone/>
+            </a:pPr>
+            <a:r>
+              <a:rPr lang="en-US" sz="750" dirty="0">
+                <a:solidFill>
+                  <a:srgbClr val="3A3A3A"/>
+                </a:solidFill>
+                <a:latin typeface="맑은 고딕" pitchFamily="34" charset="0"/>
+                <a:ea typeface="맑은 고딕" pitchFamily="34" charset="-122"/>
+                <a:cs typeface="맑은 고딕" pitchFamily="34" charset="-120"/>
+              </a:rPr>
+              <a:t>스타벅스코리아리저브DT점</a:t>
+            </a:r>
+            <a:endParaRPr lang="en-US" sz="750" dirty="0"/>
+          </a:p>
+        </p:txBody>
+      </p:sp>
+      <p:sp>
+        <p:nvSpPr>
+          <p:cNvPr id="11" name="Text 9"/>
+          <p:cNvSpPr/>
+          <p:nvPr/>
+        </p:nvSpPr>
+        <p:spPr>
+          <a:xfrm>
+            <a:off x="566928" y="5212615"/>
+            <a:ext cx="475488" cy="209082"/>
+          </a:xfrm>
+          <a:prstGeom prst="rect">
+            <a:avLst/>
+          </a:prstGeom>
+          <a:noFill/>
+          <a:ln/>
+        </p:spPr>
+        <p:txBody>
+          <a:bodyPr wrap="none" lIns="0" tIns="0" rIns="0" bIns="0" rtlCol="0" anchor="ctr"/>
+          <a:lstStyle/>
+          <a:p>
+            <a:pPr algn="r" indent="0" marL="0">
+              <a:buNone/>
+            </a:pPr>
+            <a:r>
+              <a:rPr lang="en-US" sz="800" b="1" dirty="0">
+                <a:solidFill>
+                  <a:srgbClr val="10161F"/>
+                </a:solidFill>
+                <a:latin typeface="맑은 고딕" pitchFamily="34" charset="0"/>
+                <a:ea typeface="맑은 고딕" pitchFamily="34" charset="-122"/>
+                <a:cs typeface="맑은 고딕" pitchFamily="34" charset="-120"/>
+              </a:rPr>
+              <a:t>2F</a:t>
+            </a:r>
+            <a:endParaRPr lang="en-US" sz="800" dirty="0"/>
+          </a:p>
+        </p:txBody>
+      </p:sp>
+      <p:sp>
+        <p:nvSpPr>
+          <p:cNvPr id="12" name="Shape 10"/>
+          <p:cNvSpPr/>
+          <p:nvPr/>
+        </p:nvSpPr>
+        <p:spPr>
+          <a:xfrm>
+            <a:off x="1115568" y="5244619"/>
+            <a:ext cx="1444752" cy="145074"/>
+          </a:xfrm>
+          <a:prstGeom prst="rect">
+            <a:avLst/>
+          </a:prstGeom>
+          <a:solidFill>
+            <a:srgbClr val="C5B4E3"/>
+          </a:solidFill>
+          <a:ln w="9525">
+            <a:solidFill>
+              <a:srgbClr val="5B6B73"/>
+            </a:solidFill>
+            <a:prstDash val="solid"/>
+          </a:ln>
+        </p:spPr>
+      </p:sp>
+      <p:sp>
+        <p:nvSpPr>
+          <p:cNvPr id="13" name="Text 11"/>
+          <p:cNvSpPr/>
+          <p:nvPr/>
+        </p:nvSpPr>
+        <p:spPr>
+          <a:xfrm>
+            <a:off x="566928" y="5003533"/>
+            <a:ext cx="475488" cy="209082"/>
+          </a:xfrm>
+          <a:prstGeom prst="rect">
+            <a:avLst/>
+          </a:prstGeom>
+          <a:noFill/>
+          <a:ln/>
+        </p:spPr>
+        <p:txBody>
+          <a:bodyPr wrap="none" lIns="0" tIns="0" rIns="0" bIns="0" rtlCol="0" anchor="ctr"/>
+          <a:lstStyle/>
+          <a:p>
+            <a:pPr algn="r" indent="0" marL="0">
+              <a:buNone/>
+            </a:pPr>
+            <a:r>
+              <a:rPr lang="en-US" sz="800" b="1" dirty="0">
+                <a:solidFill>
+                  <a:srgbClr val="10161F"/>
+                </a:solidFill>
+                <a:latin typeface="맑은 고딕" pitchFamily="34" charset="0"/>
+                <a:ea typeface="맑은 고딕" pitchFamily="34" charset="-122"/>
+                <a:cs typeface="맑은 고딕" pitchFamily="34" charset="-120"/>
+              </a:rPr>
+              <a:t>3F</a:t>
+            </a:r>
+            <a:endParaRPr lang="en-US" sz="800" dirty="0"/>
+          </a:p>
+        </p:txBody>
+      </p:sp>
+      <p:sp>
+        <p:nvSpPr>
+          <p:cNvPr id="14" name="Shape 12"/>
+          <p:cNvSpPr/>
+          <p:nvPr/>
+        </p:nvSpPr>
+        <p:spPr>
+          <a:xfrm>
+            <a:off x="1115568" y="5035537"/>
+            <a:ext cx="1444752" cy="145074"/>
+          </a:xfrm>
+          <a:prstGeom prst="rect">
+            <a:avLst/>
+          </a:prstGeom>
+          <a:solidFill>
+            <a:srgbClr val="C5B4E3"/>
+          </a:solidFill>
+          <a:ln w="9525">
+            <a:solidFill>
+              <a:srgbClr val="5B6B73"/>
+            </a:solidFill>
+            <a:prstDash val="solid"/>
+          </a:ln>
+        </p:spPr>
+      </p:sp>
+      <p:sp>
+        <p:nvSpPr>
+          <p:cNvPr id="15" name="Text 13"/>
+          <p:cNvSpPr/>
+          <p:nvPr/>
+        </p:nvSpPr>
+        <p:spPr>
+          <a:xfrm>
+            <a:off x="566928" y="4794451"/>
+            <a:ext cx="475488" cy="209082"/>
+          </a:xfrm>
+          <a:prstGeom prst="rect">
+            <a:avLst/>
+          </a:prstGeom>
+          <a:noFill/>
+          <a:ln/>
+        </p:spPr>
+        <p:txBody>
+          <a:bodyPr wrap="none" lIns="0" tIns="0" rIns="0" bIns="0" rtlCol="0" anchor="ctr"/>
+          <a:lstStyle/>
+          <a:p>
+            <a:pPr algn="r" indent="0" marL="0">
+              <a:buNone/>
+            </a:pPr>
+            <a:r>
+              <a:rPr lang="en-US" sz="800" b="1" dirty="0">
+                <a:solidFill>
+                  <a:srgbClr val="10161F"/>
+                </a:solidFill>
+                <a:latin typeface="맑은 고딕" pitchFamily="34" charset="0"/>
+                <a:ea typeface="맑은 고딕" pitchFamily="34" charset="-122"/>
+                <a:cs typeface="맑은 고딕" pitchFamily="34" charset="-120"/>
+              </a:rPr>
+              <a:t>4F</a:t>
+            </a:r>
+            <a:endParaRPr lang="en-US" sz="800" dirty="0"/>
+          </a:p>
+        </p:txBody>
+      </p:sp>
+      <p:sp>
+        <p:nvSpPr>
+          <p:cNvPr id="16" name="Shape 14"/>
+          <p:cNvSpPr/>
+          <p:nvPr/>
+        </p:nvSpPr>
+        <p:spPr>
+          <a:xfrm>
+            <a:off x="1115568" y="4826455"/>
+            <a:ext cx="1444752" cy="145074"/>
+          </a:xfrm>
+          <a:prstGeom prst="rect">
+            <a:avLst/>
+          </a:prstGeom>
+          <a:solidFill>
+            <a:srgbClr val="C5B4E3"/>
+          </a:solidFill>
+          <a:ln w="9525">
+            <a:solidFill>
+              <a:srgbClr val="5B6B73"/>
+            </a:solidFill>
+            <a:prstDash val="solid"/>
+          </a:ln>
+        </p:spPr>
+      </p:sp>
+      <p:sp>
+        <p:nvSpPr>
+          <p:cNvPr id="17" name="Text 15"/>
+          <p:cNvSpPr/>
+          <p:nvPr/>
+        </p:nvSpPr>
+        <p:spPr>
+          <a:xfrm>
+            <a:off x="566928" y="4585368"/>
+            <a:ext cx="475488" cy="209082"/>
+          </a:xfrm>
+          <a:prstGeom prst="rect">
+            <a:avLst/>
+          </a:prstGeom>
+          <a:noFill/>
+          <a:ln/>
+        </p:spPr>
+        <p:txBody>
+          <a:bodyPr wrap="none" lIns="0" tIns="0" rIns="0" bIns="0" rtlCol="0" anchor="ctr"/>
+          <a:lstStyle/>
+          <a:p>
+            <a:pPr algn="r" indent="0" marL="0">
+              <a:buNone/>
+            </a:pPr>
+            <a:r>
+              <a:rPr lang="en-US" sz="800" b="1" dirty="0">
+                <a:solidFill>
+                  <a:srgbClr val="10161F"/>
+                </a:solidFill>
+                <a:latin typeface="맑은 고딕" pitchFamily="34" charset="0"/>
+                <a:ea typeface="맑은 고딕" pitchFamily="34" charset="-122"/>
+                <a:cs typeface="맑은 고딕" pitchFamily="34" charset="-120"/>
+              </a:rPr>
+              <a:t>5F</a:t>
+            </a:r>
+            <a:endParaRPr lang="en-US" sz="800" dirty="0"/>
+          </a:p>
+        </p:txBody>
+      </p:sp>
+      <p:sp>
+        <p:nvSpPr>
+          <p:cNvPr id="18" name="Shape 16"/>
+          <p:cNvSpPr/>
+          <p:nvPr/>
+        </p:nvSpPr>
+        <p:spPr>
+          <a:xfrm>
+            <a:off x="1115568" y="4617372"/>
+            <a:ext cx="1444752" cy="145074"/>
+          </a:xfrm>
+          <a:prstGeom prst="rect">
+            <a:avLst/>
+          </a:prstGeom>
+          <a:solidFill>
+            <a:srgbClr val="C5B4E3"/>
+          </a:solidFill>
+          <a:ln w="9525">
+            <a:solidFill>
+              <a:srgbClr val="5B6B73"/>
+            </a:solidFill>
+            <a:prstDash val="solid"/>
+          </a:ln>
+        </p:spPr>
+      </p:sp>
+      <p:sp>
+        <p:nvSpPr>
+          <p:cNvPr id="19" name="Text 17"/>
+          <p:cNvSpPr/>
+          <p:nvPr/>
+        </p:nvSpPr>
+        <p:spPr>
+          <a:xfrm>
+            <a:off x="566928" y="4376286"/>
+            <a:ext cx="475488" cy="209082"/>
+          </a:xfrm>
+          <a:prstGeom prst="rect">
+            <a:avLst/>
+          </a:prstGeom>
+          <a:noFill/>
+          <a:ln/>
+        </p:spPr>
+        <p:txBody>
+          <a:bodyPr wrap="none" lIns="0" tIns="0" rIns="0" bIns="0" rtlCol="0" anchor="ctr"/>
+          <a:lstStyle/>
+          <a:p>
+            <a:pPr algn="r" indent="0" marL="0">
+              <a:buNone/>
+            </a:pPr>
+            <a:r>
+              <a:rPr lang="en-US" sz="800" b="1" dirty="0">
+                <a:solidFill>
+                  <a:srgbClr val="10161F"/>
+                </a:solidFill>
+                <a:latin typeface="맑은 고딕" pitchFamily="34" charset="0"/>
+                <a:ea typeface="맑은 고딕" pitchFamily="34" charset="-122"/>
+                <a:cs typeface="맑은 고딕" pitchFamily="34" charset="-120"/>
+              </a:rPr>
+              <a:t>6F</a:t>
+            </a:r>
+            <a:endParaRPr lang="en-US" sz="800" dirty="0"/>
+          </a:p>
+        </p:txBody>
+      </p:sp>
+      <p:sp>
+        <p:nvSpPr>
+          <p:cNvPr id="20" name="Shape 18"/>
+          <p:cNvSpPr/>
+          <p:nvPr/>
+        </p:nvSpPr>
+        <p:spPr>
+          <a:xfrm>
+            <a:off x="1115568" y="4408290"/>
+            <a:ext cx="1444752" cy="145074"/>
+          </a:xfrm>
+          <a:prstGeom prst="rect">
+            <a:avLst/>
+          </a:prstGeom>
+          <a:solidFill>
+            <a:srgbClr val="C5B4E3"/>
+          </a:solidFill>
+          <a:ln w="9525">
+            <a:solidFill>
+              <a:srgbClr val="5B6B73"/>
+            </a:solidFill>
+            <a:prstDash val="solid"/>
+          </a:ln>
+        </p:spPr>
+      </p:sp>
+      <p:sp>
+        <p:nvSpPr>
+          <p:cNvPr id="21" name="Text 19"/>
+          <p:cNvSpPr/>
+          <p:nvPr/>
+        </p:nvSpPr>
+        <p:spPr>
+          <a:xfrm>
+            <a:off x="566928" y="4167204"/>
+            <a:ext cx="475488" cy="209082"/>
+          </a:xfrm>
+          <a:prstGeom prst="rect">
+            <a:avLst/>
+          </a:prstGeom>
+          <a:noFill/>
+          <a:ln/>
+        </p:spPr>
+        <p:txBody>
+          <a:bodyPr wrap="none" lIns="0" tIns="0" rIns="0" bIns="0" rtlCol="0" anchor="ctr"/>
+          <a:lstStyle/>
+          <a:p>
+            <a:pPr algn="r" indent="0" marL="0">
+              <a:buNone/>
+            </a:pPr>
+            <a:r>
+              <a:rPr lang="en-US" sz="800" b="1" dirty="0">
+                <a:solidFill>
+                  <a:srgbClr val="10161F"/>
+                </a:solidFill>
+                <a:latin typeface="맑은 고딕" pitchFamily="34" charset="0"/>
+                <a:ea typeface="맑은 고딕" pitchFamily="34" charset="-122"/>
+                <a:cs typeface="맑은 고딕" pitchFamily="34" charset="-120"/>
+              </a:rPr>
+              <a:t>7F</a:t>
+            </a:r>
+            <a:endParaRPr lang="en-US" sz="800" dirty="0"/>
+          </a:p>
+        </p:txBody>
+      </p:sp>
+      <p:sp>
+        <p:nvSpPr>
+          <p:cNvPr id="22" name="Shape 20"/>
+          <p:cNvSpPr/>
+          <p:nvPr/>
+        </p:nvSpPr>
+        <p:spPr>
+          <a:xfrm>
+            <a:off x="1115568" y="4199208"/>
+            <a:ext cx="1444752" cy="145074"/>
+          </a:xfrm>
+          <a:prstGeom prst="rect">
+            <a:avLst/>
+          </a:prstGeom>
+          <a:solidFill>
+            <a:srgbClr val="C5B4E3"/>
+          </a:solidFill>
+          <a:ln w="9525">
+            <a:solidFill>
+              <a:srgbClr val="5B6B73"/>
+            </a:solidFill>
+            <a:prstDash val="solid"/>
+          </a:ln>
+        </p:spPr>
+      </p:sp>
+      <p:sp>
+        <p:nvSpPr>
+          <p:cNvPr id="23" name="Text 21"/>
+          <p:cNvSpPr/>
+          <p:nvPr/>
+        </p:nvSpPr>
+        <p:spPr>
+          <a:xfrm>
+            <a:off x="566928" y="3958122"/>
+            <a:ext cx="475488" cy="209082"/>
+          </a:xfrm>
+          <a:prstGeom prst="rect">
+            <a:avLst/>
+          </a:prstGeom>
+          <a:noFill/>
+          <a:ln/>
+        </p:spPr>
+        <p:txBody>
+          <a:bodyPr wrap="none" lIns="0" tIns="0" rIns="0" bIns="0" rtlCol="0" anchor="ctr"/>
+          <a:lstStyle/>
+          <a:p>
+            <a:pPr algn="r" indent="0" marL="0">
+              <a:buNone/>
+            </a:pPr>
+            <a:r>
+              <a:rPr lang="en-US" sz="800" b="1" dirty="0">
+                <a:solidFill>
+                  <a:srgbClr val="10161F"/>
+                </a:solidFill>
+                <a:latin typeface="맑은 고딕" pitchFamily="34" charset="0"/>
+                <a:ea typeface="맑은 고딕" pitchFamily="34" charset="-122"/>
+                <a:cs typeface="맑은 고딕" pitchFamily="34" charset="-120"/>
+              </a:rPr>
+              <a:t>8F</a:t>
+            </a:r>
+            <a:endParaRPr lang="en-US" sz="800" dirty="0"/>
+          </a:p>
+        </p:txBody>
+      </p:sp>
+      <p:sp>
+        <p:nvSpPr>
+          <p:cNvPr id="24" name="Shape 22"/>
+          <p:cNvSpPr/>
+          <p:nvPr/>
+        </p:nvSpPr>
+        <p:spPr>
+          <a:xfrm>
+            <a:off x="1115568" y="3990126"/>
+            <a:ext cx="1444752" cy="145074"/>
+          </a:xfrm>
+          <a:prstGeom prst="rect">
+            <a:avLst/>
+          </a:prstGeom>
+          <a:solidFill>
+            <a:srgbClr val="C5B4E3"/>
+          </a:solidFill>
+          <a:ln w="9525">
+            <a:solidFill>
+              <a:srgbClr val="5B6B73"/>
+            </a:solidFill>
+            <a:prstDash val="solid"/>
+          </a:ln>
+        </p:spPr>
+      </p:sp>
+      <p:sp>
+        <p:nvSpPr>
+          <p:cNvPr id="25" name="Text 23"/>
+          <p:cNvSpPr/>
+          <p:nvPr/>
+        </p:nvSpPr>
+        <p:spPr>
+          <a:xfrm>
+            <a:off x="566928" y="3749040"/>
+            <a:ext cx="475488" cy="209082"/>
+          </a:xfrm>
+          <a:prstGeom prst="rect">
+            <a:avLst/>
+          </a:prstGeom>
+          <a:noFill/>
+          <a:ln/>
+        </p:spPr>
+        <p:txBody>
+          <a:bodyPr wrap="none" lIns="0" tIns="0" rIns="0" bIns="0" rtlCol="0" anchor="ctr"/>
+          <a:lstStyle/>
+          <a:p>
+            <a:pPr algn="r" indent="0" marL="0">
+              <a:buNone/>
+            </a:pPr>
+            <a:r>
+              <a:rPr lang="en-US" sz="800" b="1" dirty="0">
+                <a:solidFill>
+                  <a:srgbClr val="10161F"/>
+                </a:solidFill>
+                <a:latin typeface="맑은 고딕" pitchFamily="34" charset="0"/>
+                <a:ea typeface="맑은 고딕" pitchFamily="34" charset="-122"/>
+                <a:cs typeface="맑은 고딕" pitchFamily="34" charset="-120"/>
+              </a:rPr>
+              <a:t>9F</a:t>
+            </a:r>
+            <a:endParaRPr lang="en-US" sz="800" dirty="0"/>
+          </a:p>
+        </p:txBody>
+      </p:sp>
+      <p:sp>
+        <p:nvSpPr>
+          <p:cNvPr id="26" name="Shape 24"/>
+          <p:cNvSpPr/>
+          <p:nvPr/>
+        </p:nvSpPr>
+        <p:spPr>
+          <a:xfrm>
+            <a:off x="1115568" y="3781044"/>
+            <a:ext cx="1444752" cy="145074"/>
+          </a:xfrm>
+          <a:prstGeom prst="rect">
+            <a:avLst/>
+          </a:prstGeom>
+          <a:solidFill>
+            <a:srgbClr val="C5B4E3"/>
+          </a:solidFill>
+          <a:ln w="9525">
+            <a:solidFill>
+              <a:srgbClr val="5B6B73"/>
+            </a:solidFill>
+            <a:prstDash val="solid"/>
+          </a:ln>
+        </p:spPr>
+      </p:sp>
+      <p:sp>
+        <p:nvSpPr>
+          <p:cNvPr id="27" name="Text 25"/>
+          <p:cNvSpPr/>
+          <p:nvPr/>
+        </p:nvSpPr>
+        <p:spPr>
+          <a:xfrm>
+            <a:off x="566928" y="3539958"/>
+            <a:ext cx="475488" cy="209082"/>
+          </a:xfrm>
+          <a:prstGeom prst="rect">
+            <a:avLst/>
+          </a:prstGeom>
+          <a:noFill/>
+          <a:ln/>
+        </p:spPr>
+        <p:txBody>
+          <a:bodyPr wrap="none" lIns="0" tIns="0" rIns="0" bIns="0" rtlCol="0" anchor="ctr"/>
+          <a:lstStyle/>
+          <a:p>
+            <a:pPr algn="r" indent="0" marL="0">
+              <a:buNone/>
+            </a:pPr>
+            <a:r>
+              <a:rPr lang="en-US" sz="800" b="1" dirty="0">
+                <a:solidFill>
+                  <a:srgbClr val="10161F"/>
+                </a:solidFill>
+                <a:latin typeface="맑은 고딕" pitchFamily="34" charset="0"/>
+                <a:ea typeface="맑은 고딕" pitchFamily="34" charset="-122"/>
+                <a:cs typeface="맑은 고딕" pitchFamily="34" charset="-120"/>
+              </a:rPr>
+              <a:t>10F</a:t>
+            </a:r>
+            <a:endParaRPr lang="en-US" sz="800" dirty="0"/>
+          </a:p>
+        </p:txBody>
+      </p:sp>
+      <p:sp>
+        <p:nvSpPr>
+          <p:cNvPr id="28" name="Shape 26"/>
+          <p:cNvSpPr/>
+          <p:nvPr/>
+        </p:nvSpPr>
+        <p:spPr>
+          <a:xfrm>
+            <a:off x="1115568" y="3571962"/>
+            <a:ext cx="1444752" cy="145074"/>
+          </a:xfrm>
+          <a:prstGeom prst="rect">
+            <a:avLst/>
+          </a:prstGeom>
+          <a:solidFill>
+            <a:srgbClr val="C5B4E3"/>
+          </a:solidFill>
+          <a:ln w="9525">
+            <a:solidFill>
+              <a:srgbClr val="5B6B73"/>
+            </a:solidFill>
+            <a:prstDash val="solid"/>
+          </a:ln>
+        </p:spPr>
+      </p:sp>
+      <p:sp>
+        <p:nvSpPr>
+          <p:cNvPr id="29" name="Text 27"/>
+          <p:cNvSpPr/>
+          <p:nvPr/>
+        </p:nvSpPr>
+        <p:spPr>
+          <a:xfrm>
+            <a:off x="566928" y="3330876"/>
+            <a:ext cx="475488" cy="209082"/>
+          </a:xfrm>
+          <a:prstGeom prst="rect">
+            <a:avLst/>
+          </a:prstGeom>
+          <a:noFill/>
+          <a:ln/>
+        </p:spPr>
+        <p:txBody>
+          <a:bodyPr wrap="none" lIns="0" tIns="0" rIns="0" bIns="0" rtlCol="0" anchor="ctr"/>
+          <a:lstStyle/>
+          <a:p>
+            <a:pPr algn="r" indent="0" marL="0">
+              <a:buNone/>
+            </a:pPr>
+            <a:r>
+              <a:rPr lang="en-US" sz="800" b="1" dirty="0">
+                <a:solidFill>
+                  <a:srgbClr val="10161F"/>
+                </a:solidFill>
+                <a:latin typeface="맑은 고딕" pitchFamily="34" charset="0"/>
+                <a:ea typeface="맑은 고딕" pitchFamily="34" charset="-122"/>
+                <a:cs typeface="맑은 고딕" pitchFamily="34" charset="-120"/>
+              </a:rPr>
+              <a:t>11F</a:t>
+            </a:r>
+            <a:endParaRPr lang="en-US" sz="800" dirty="0"/>
+          </a:p>
+        </p:txBody>
+      </p:sp>
+      <p:sp>
+        <p:nvSpPr>
+          <p:cNvPr id="30" name="Shape 28"/>
+          <p:cNvSpPr/>
+          <p:nvPr/>
+        </p:nvSpPr>
+        <p:spPr>
+          <a:xfrm>
+            <a:off x="1115568" y="3362880"/>
+            <a:ext cx="1444752" cy="145074"/>
+          </a:xfrm>
+          <a:prstGeom prst="rect">
+            <a:avLst/>
+          </a:prstGeom>
+          <a:solidFill>
+            <a:srgbClr val="C5B4E3"/>
+          </a:solidFill>
+          <a:ln w="9525">
+            <a:solidFill>
+              <a:srgbClr val="5B6B73"/>
+            </a:solidFill>
+            <a:prstDash val="solid"/>
+          </a:ln>
+        </p:spPr>
+      </p:sp>
+      <p:sp>
+        <p:nvSpPr>
+          <p:cNvPr id="31" name="Text 29"/>
+          <p:cNvSpPr/>
+          <p:nvPr/>
+        </p:nvSpPr>
+        <p:spPr>
+          <a:xfrm>
+            <a:off x="566928" y="3121794"/>
+            <a:ext cx="475488" cy="209082"/>
+          </a:xfrm>
+          <a:prstGeom prst="rect">
+            <a:avLst/>
+          </a:prstGeom>
+          <a:noFill/>
+          <a:ln/>
+        </p:spPr>
+        <p:txBody>
+          <a:bodyPr wrap="none" lIns="0" tIns="0" rIns="0" bIns="0" rtlCol="0" anchor="ctr"/>
+          <a:lstStyle/>
+          <a:p>
+            <a:pPr algn="r" indent="0" marL="0">
+              <a:buNone/>
+            </a:pPr>
+            <a:r>
+              <a:rPr lang="en-US" sz="800" b="1" dirty="0">
+                <a:solidFill>
+                  <a:srgbClr val="10161F"/>
+                </a:solidFill>
+                <a:latin typeface="맑은 고딕" pitchFamily="34" charset="0"/>
+                <a:ea typeface="맑은 고딕" pitchFamily="34" charset="-122"/>
+                <a:cs typeface="맑은 고딕" pitchFamily="34" charset="-120"/>
+              </a:rPr>
+              <a:t>12F</a:t>
+            </a:r>
+            <a:endParaRPr lang="en-US" sz="800" dirty="0"/>
+          </a:p>
+        </p:txBody>
+      </p:sp>
+      <p:sp>
+        <p:nvSpPr>
+          <p:cNvPr id="32" name="Shape 30"/>
+          <p:cNvSpPr/>
+          <p:nvPr/>
+        </p:nvSpPr>
+        <p:spPr>
+          <a:xfrm>
+            <a:off x="1115568" y="3153798"/>
+            <a:ext cx="1444752" cy="145074"/>
+          </a:xfrm>
+          <a:prstGeom prst="rect">
+            <a:avLst/>
+          </a:prstGeom>
+          <a:solidFill>
+            <a:srgbClr val="C5B4E3"/>
+          </a:solidFill>
+          <a:ln w="9525">
+            <a:solidFill>
+              <a:srgbClr val="5B6B73"/>
+            </a:solidFill>
+            <a:prstDash val="solid"/>
+          </a:ln>
+        </p:spPr>
+      </p:sp>
+      <p:sp>
+        <p:nvSpPr>
+          <p:cNvPr id="33" name="Text 31"/>
+          <p:cNvSpPr/>
+          <p:nvPr/>
+        </p:nvSpPr>
+        <p:spPr>
+          <a:xfrm>
+            <a:off x="566928" y="2912712"/>
+            <a:ext cx="475488" cy="209082"/>
+          </a:xfrm>
+          <a:prstGeom prst="rect">
+            <a:avLst/>
+          </a:prstGeom>
+          <a:noFill/>
+          <a:ln/>
+        </p:spPr>
+        <p:txBody>
+          <a:bodyPr wrap="none" lIns="0" tIns="0" rIns="0" bIns="0" rtlCol="0" anchor="ctr"/>
+          <a:lstStyle/>
+          <a:p>
+            <a:pPr algn="r" indent="0" marL="0">
+              <a:buNone/>
+            </a:pPr>
+            <a:r>
+              <a:rPr lang="en-US" sz="800" b="1" dirty="0">
+                <a:solidFill>
+                  <a:srgbClr val="10161F"/>
+                </a:solidFill>
+                <a:latin typeface="맑은 고딕" pitchFamily="34" charset="0"/>
+                <a:ea typeface="맑은 고딕" pitchFamily="34" charset="-122"/>
+                <a:cs typeface="맑은 고딕" pitchFamily="34" charset="-120"/>
+              </a:rPr>
+              <a:t>13F</a:t>
+            </a:r>
+            <a:endParaRPr lang="en-US" sz="800" dirty="0"/>
+          </a:p>
+        </p:txBody>
+      </p:sp>
+      <p:sp>
+        <p:nvSpPr>
+          <p:cNvPr id="34" name="Shape 32"/>
+          <p:cNvSpPr/>
+          <p:nvPr/>
+        </p:nvSpPr>
+        <p:spPr>
+          <a:xfrm>
+            <a:off x="1115568" y="2944716"/>
+            <a:ext cx="1444752" cy="145074"/>
+          </a:xfrm>
+          <a:prstGeom prst="rect">
+            <a:avLst/>
+          </a:prstGeom>
+          <a:solidFill>
+            <a:srgbClr val="C5B4E3"/>
+          </a:solidFill>
+          <a:ln w="9525">
+            <a:solidFill>
+              <a:srgbClr val="5B6B73"/>
+            </a:solidFill>
+            <a:prstDash val="solid"/>
+          </a:ln>
+        </p:spPr>
+      </p:sp>
+      <p:sp>
+        <p:nvSpPr>
+          <p:cNvPr id="35" name="Text 33"/>
+          <p:cNvSpPr/>
+          <p:nvPr/>
+        </p:nvSpPr>
+        <p:spPr>
+          <a:xfrm>
+            <a:off x="566928" y="2703629"/>
+            <a:ext cx="475488" cy="209082"/>
+          </a:xfrm>
+          <a:prstGeom prst="rect">
+            <a:avLst/>
+          </a:prstGeom>
+          <a:noFill/>
+          <a:ln/>
+        </p:spPr>
+        <p:txBody>
+          <a:bodyPr wrap="none" lIns="0" tIns="0" rIns="0" bIns="0" rtlCol="0" anchor="ctr"/>
+          <a:lstStyle/>
+          <a:p>
+            <a:pPr algn="r" indent="0" marL="0">
+              <a:buNone/>
+            </a:pPr>
+            <a:r>
+              <a:rPr lang="en-US" sz="800" b="1" dirty="0">
+                <a:solidFill>
+                  <a:srgbClr val="10161F"/>
+                </a:solidFill>
+                <a:latin typeface="맑은 고딕" pitchFamily="34" charset="0"/>
+                <a:ea typeface="맑은 고딕" pitchFamily="34" charset="-122"/>
+                <a:cs typeface="맑은 고딕" pitchFamily="34" charset="-120"/>
+              </a:rPr>
+              <a:t>14F</a:t>
+            </a:r>
+            <a:endParaRPr lang="en-US" sz="800" dirty="0"/>
+          </a:p>
+        </p:txBody>
+      </p:sp>
+      <p:sp>
+        <p:nvSpPr>
+          <p:cNvPr id="36" name="Shape 34"/>
+          <p:cNvSpPr/>
+          <p:nvPr/>
+        </p:nvSpPr>
+        <p:spPr>
+          <a:xfrm>
+            <a:off x="1115568" y="2735633"/>
+            <a:ext cx="1444752" cy="145074"/>
+          </a:xfrm>
+          <a:prstGeom prst="rect">
+            <a:avLst/>
+          </a:prstGeom>
+          <a:solidFill>
+            <a:srgbClr val="C5B4E3"/>
+          </a:solidFill>
+          <a:ln w="9525">
+            <a:solidFill>
+              <a:srgbClr val="5B6B73"/>
+            </a:solidFill>
+            <a:prstDash val="solid"/>
+          </a:ln>
+        </p:spPr>
+      </p:sp>
+      <p:sp>
+        <p:nvSpPr>
+          <p:cNvPr id="37" name="Text 35"/>
+          <p:cNvSpPr/>
+          <p:nvPr/>
+        </p:nvSpPr>
+        <p:spPr>
+          <a:xfrm>
+            <a:off x="566928" y="2494547"/>
+            <a:ext cx="475488" cy="209082"/>
+          </a:xfrm>
+          <a:prstGeom prst="rect">
+            <a:avLst/>
+          </a:prstGeom>
+          <a:noFill/>
+          <a:ln/>
+        </p:spPr>
+        <p:txBody>
+          <a:bodyPr wrap="none" lIns="0" tIns="0" rIns="0" bIns="0" rtlCol="0" anchor="ctr"/>
+          <a:lstStyle/>
+          <a:p>
+            <a:pPr algn="r" indent="0" marL="0">
+              <a:buNone/>
+            </a:pPr>
+            <a:r>
+              <a:rPr lang="en-US" sz="800" b="1" dirty="0">
+                <a:solidFill>
+                  <a:srgbClr val="10161F"/>
+                </a:solidFill>
+                <a:latin typeface="맑은 고딕" pitchFamily="34" charset="0"/>
+                <a:ea typeface="맑은 고딕" pitchFamily="34" charset="-122"/>
+                <a:cs typeface="맑은 고딕" pitchFamily="34" charset="-120"/>
+              </a:rPr>
+              <a:t>15F</a:t>
+            </a:r>
+            <a:endParaRPr lang="en-US" sz="800" dirty="0"/>
+          </a:p>
+        </p:txBody>
+      </p:sp>
+      <p:sp>
+        <p:nvSpPr>
+          <p:cNvPr id="38" name="Shape 36"/>
+          <p:cNvSpPr/>
+          <p:nvPr/>
+        </p:nvSpPr>
+        <p:spPr>
+          <a:xfrm>
+            <a:off x="1115568" y="2526551"/>
+            <a:ext cx="1444752" cy="145074"/>
+          </a:xfrm>
+          <a:prstGeom prst="rect">
+            <a:avLst/>
+          </a:prstGeom>
+          <a:solidFill>
+            <a:srgbClr val="C5B4E3"/>
+          </a:solidFill>
+          <a:ln w="9525">
+            <a:solidFill>
+              <a:srgbClr val="5B6B73"/>
+            </a:solidFill>
+            <a:prstDash val="solid"/>
+          </a:ln>
+        </p:spPr>
+      </p:sp>
+      <p:sp>
+        <p:nvSpPr>
+          <p:cNvPr id="39" name="Text 37"/>
+          <p:cNvSpPr/>
+          <p:nvPr/>
+        </p:nvSpPr>
+        <p:spPr>
+          <a:xfrm>
+            <a:off x="566928" y="2285465"/>
+            <a:ext cx="475488" cy="209082"/>
+          </a:xfrm>
+          <a:prstGeom prst="rect">
+            <a:avLst/>
+          </a:prstGeom>
+          <a:noFill/>
+          <a:ln/>
+        </p:spPr>
+        <p:txBody>
+          <a:bodyPr wrap="none" lIns="0" tIns="0" rIns="0" bIns="0" rtlCol="0" anchor="ctr"/>
+          <a:lstStyle/>
+          <a:p>
+            <a:pPr algn="r" indent="0" marL="0">
+              <a:buNone/>
+            </a:pPr>
+            <a:r>
+              <a:rPr lang="en-US" sz="800" b="1" dirty="0">
+                <a:solidFill>
+                  <a:srgbClr val="10161F"/>
+                </a:solidFill>
+                <a:latin typeface="맑은 고딕" pitchFamily="34" charset="0"/>
+                <a:ea typeface="맑은 고딕" pitchFamily="34" charset="-122"/>
+                <a:cs typeface="맑은 고딕" pitchFamily="34" charset="-120"/>
+              </a:rPr>
+              <a:t>16F</a:t>
+            </a:r>
+            <a:endParaRPr lang="en-US" sz="800" dirty="0"/>
+          </a:p>
+        </p:txBody>
+      </p:sp>
+      <p:sp>
+        <p:nvSpPr>
+          <p:cNvPr id="40" name="Shape 38"/>
+          <p:cNvSpPr/>
+          <p:nvPr/>
+        </p:nvSpPr>
+        <p:spPr>
+          <a:xfrm>
+            <a:off x="1115568" y="2317469"/>
+            <a:ext cx="1444752" cy="145074"/>
+          </a:xfrm>
+          <a:prstGeom prst="rect">
+            <a:avLst/>
+          </a:prstGeom>
+          <a:solidFill>
+            <a:srgbClr val="C5B4E3"/>
+          </a:solidFill>
+          <a:ln w="9525">
+            <a:solidFill>
+              <a:srgbClr val="5B6B73"/>
+            </a:solidFill>
+            <a:prstDash val="solid"/>
+          </a:ln>
+        </p:spPr>
+      </p:sp>
+      <p:sp>
+        <p:nvSpPr>
+          <p:cNvPr id="41" name="Text 39"/>
+          <p:cNvSpPr/>
+          <p:nvPr/>
+        </p:nvSpPr>
+        <p:spPr>
+          <a:xfrm>
+            <a:off x="566928" y="2076383"/>
+            <a:ext cx="475488" cy="209082"/>
+          </a:xfrm>
+          <a:prstGeom prst="rect">
+            <a:avLst/>
+          </a:prstGeom>
+          <a:noFill/>
+          <a:ln/>
+        </p:spPr>
+        <p:txBody>
+          <a:bodyPr wrap="none" lIns="0" tIns="0" rIns="0" bIns="0" rtlCol="0" anchor="ctr"/>
+          <a:lstStyle/>
+          <a:p>
+            <a:pPr algn="r" indent="0" marL="0">
+              <a:buNone/>
+            </a:pPr>
+            <a:r>
+              <a:rPr lang="en-US" sz="800" b="1" dirty="0">
+                <a:solidFill>
+                  <a:srgbClr val="10161F"/>
+                </a:solidFill>
+                <a:latin typeface="맑은 고딕" pitchFamily="34" charset="0"/>
+                <a:ea typeface="맑은 고딕" pitchFamily="34" charset="-122"/>
+                <a:cs typeface="맑은 고딕" pitchFamily="34" charset="-120"/>
+              </a:rPr>
+              <a:t>17F</a:t>
+            </a:r>
+            <a:endParaRPr lang="en-US" sz="800" dirty="0"/>
+          </a:p>
+        </p:txBody>
+      </p:sp>
+      <p:sp>
+        <p:nvSpPr>
+          <p:cNvPr id="42" name="Shape 40"/>
+          <p:cNvSpPr/>
+          <p:nvPr/>
+        </p:nvSpPr>
+        <p:spPr>
+          <a:xfrm>
+            <a:off x="1115568" y="2108387"/>
+            <a:ext cx="1444752" cy="145074"/>
+          </a:xfrm>
+          <a:prstGeom prst="rect">
+            <a:avLst/>
+          </a:prstGeom>
+          <a:solidFill>
+            <a:srgbClr val="C5B4E3"/>
+          </a:solidFill>
+          <a:ln w="9525">
+            <a:solidFill>
+              <a:srgbClr val="5B6B73"/>
+            </a:solidFill>
+            <a:prstDash val="solid"/>
+          </a:ln>
+        </p:spPr>
+      </p:sp>
+      <p:sp>
+        <p:nvSpPr>
+          <p:cNvPr id="43" name="Text 41"/>
+          <p:cNvSpPr/>
+          <p:nvPr/>
+        </p:nvSpPr>
+        <p:spPr>
+          <a:xfrm>
+            <a:off x="566928" y="1867301"/>
+            <a:ext cx="475488" cy="209082"/>
+          </a:xfrm>
+          <a:prstGeom prst="rect">
+            <a:avLst/>
+          </a:prstGeom>
+          <a:noFill/>
+          <a:ln/>
+        </p:spPr>
+        <p:txBody>
+          <a:bodyPr wrap="none" lIns="0" tIns="0" rIns="0" bIns="0" rtlCol="0" anchor="ctr"/>
+          <a:lstStyle/>
+          <a:p>
+            <a:pPr algn="r" indent="0" marL="0">
+              <a:buNone/>
+            </a:pPr>
+            <a:r>
+              <a:rPr lang="en-US" sz="800" b="1" dirty="0">
+                <a:solidFill>
+                  <a:srgbClr val="10161F"/>
+                </a:solidFill>
+                <a:latin typeface="맑은 고딕" pitchFamily="34" charset="0"/>
+                <a:ea typeface="맑은 고딕" pitchFamily="34" charset="-122"/>
+                <a:cs typeface="맑은 고딕" pitchFamily="34" charset="-120"/>
+              </a:rPr>
+              <a:t>18F</a:t>
+            </a:r>
+            <a:endParaRPr lang="en-US" sz="800" dirty="0"/>
+          </a:p>
+        </p:txBody>
+      </p:sp>
+      <p:sp>
+        <p:nvSpPr>
+          <p:cNvPr id="44" name="Shape 42"/>
+          <p:cNvSpPr/>
+          <p:nvPr/>
+        </p:nvSpPr>
+        <p:spPr>
+          <a:xfrm>
+            <a:off x="1115568" y="1899305"/>
+            <a:ext cx="1444752" cy="145074"/>
+          </a:xfrm>
+          <a:prstGeom prst="rect">
+            <a:avLst/>
+          </a:prstGeom>
+          <a:solidFill>
+            <a:srgbClr val="C5B4E3"/>
+          </a:solidFill>
+          <a:ln w="9525">
+            <a:solidFill>
+              <a:srgbClr val="5B6B73"/>
+            </a:solidFill>
+            <a:prstDash val="solid"/>
+          </a:ln>
+        </p:spPr>
+      </p:sp>
+      <p:sp>
+        <p:nvSpPr>
+          <p:cNvPr id="45" name="Text 43"/>
+          <p:cNvSpPr/>
+          <p:nvPr/>
+        </p:nvSpPr>
+        <p:spPr>
+          <a:xfrm>
+            <a:off x="603504" y="5630779"/>
+            <a:ext cx="232664" cy="221381"/>
+          </a:xfrm>
+          <a:prstGeom prst="rect">
+            <a:avLst/>
+          </a:prstGeom>
+          <a:noFill/>
+          <a:ln/>
+        </p:spPr>
+        <p:txBody>
+          <a:bodyPr wrap="none" lIns="0" tIns="0" rIns="0" bIns="0" rtlCol="0" anchor="ctr"/>
+          <a:lstStyle/>
+          <a:p>
+            <a:pPr indent="0" marL="0">
+              <a:buNone/>
+            </a:pPr>
+            <a:r>
+              <a:rPr lang="en-US" sz="700" dirty="0">
+                <a:solidFill>
+                  <a:srgbClr val="5B6B73"/>
+                </a:solidFill>
+                <a:latin typeface="맑은 고딕" pitchFamily="34" charset="0"/>
+                <a:ea typeface="맑은 고딕" pitchFamily="34" charset="-122"/>
+                <a:cs typeface="맑은 고딕" pitchFamily="34" charset="-120"/>
+              </a:rPr>
+              <a:t>만기</a:t>
+            </a:r>
+            <a:endParaRPr lang="en-US" sz="700" dirty="0"/>
+          </a:p>
+        </p:txBody>
+      </p:sp>
+      <p:sp>
+        <p:nvSpPr>
+          <p:cNvPr id="46" name="Shape 44"/>
+          <p:cNvSpPr/>
+          <p:nvPr/>
+        </p:nvSpPr>
+        <p:spPr>
+          <a:xfrm>
+            <a:off x="872744" y="5686605"/>
+            <a:ext cx="118872" cy="109728"/>
+          </a:xfrm>
+          <a:prstGeom prst="rect">
+            <a:avLst/>
+          </a:prstGeom>
+          <a:solidFill>
+            <a:srgbClr val="C5B4E3"/>
+          </a:solidFill>
+          <a:ln w="6350">
+            <a:solidFill>
+              <a:srgbClr val="5B6B73"/>
+            </a:solidFill>
+            <a:prstDash val="solid"/>
+          </a:ln>
+        </p:spPr>
+      </p:sp>
+      <p:sp>
+        <p:nvSpPr>
+          <p:cNvPr id="47" name="Text 45"/>
+          <p:cNvSpPr/>
+          <p:nvPr/>
+        </p:nvSpPr>
+        <p:spPr>
+          <a:xfrm>
+            <a:off x="1028192" y="5630779"/>
+            <a:ext cx="250444" cy="221381"/>
+          </a:xfrm>
+          <a:prstGeom prst="rect">
+            <a:avLst/>
+          </a:prstGeom>
+          <a:noFill/>
+          <a:ln/>
+        </p:spPr>
+        <p:txBody>
+          <a:bodyPr wrap="none" lIns="0" tIns="0" rIns="0" bIns="0" rtlCol="0" anchor="ctr"/>
+          <a:lstStyle/>
+          <a:p>
+            <a:pPr indent="0" marL="0">
+              <a:buNone/>
+            </a:pPr>
+            <a:r>
+              <a:rPr lang="en-US" sz="700" dirty="0">
+                <a:solidFill>
+                  <a:srgbClr val="5B6B73"/>
+                </a:solidFill>
+                <a:latin typeface="맑은 고딕" pitchFamily="34" charset="0"/>
+                <a:ea typeface="맑은 고딕" pitchFamily="34" charset="-122"/>
+                <a:cs typeface="맑은 고딕" pitchFamily="34" charset="-120"/>
+              </a:rPr>
+              <a:t>2028</a:t>
+            </a:r>
+            <a:endParaRPr lang="en-US" sz="700" dirty="0"/>
           </a:p>
         </p:txBody>
       </p:sp>
@@ -1068,26 +2387,26 @@
           </p:nvPr>
         </p:nvGraphicFramePr>
         <p:xfrm>
-          <a:off x="3950208" y="1645920"/>
-          <a:ext cx="7674559" cy="914400"/>
+          <a:off x="2807208" y="1645920"/>
+          <a:ext cx="8817559" cy="914400"/>
         </p:xfrm>
         <a:graphic>
           <a:graphicData uri="http://schemas.openxmlformats.org/drawingml/2006/table">
             <a:tbl>
               <a:tblPr/>
               <a:tblGrid>
-                <a:gridCol w="438912"/>
-                <a:gridCol w="960120"/>
-                <a:gridCol w="804672"/>
-                <a:gridCol w="713232"/>
-                <a:gridCol w="713232"/>
-                <a:gridCol w="713232"/>
-                <a:gridCol w="713232"/>
-                <a:gridCol w="713232"/>
-                <a:gridCol w="713232"/>
-                <a:gridCol w="1188720"/>
+                <a:gridCol w="448056"/>
+                <a:gridCol w="2020824"/>
+                <a:gridCol w="585216"/>
+                <a:gridCol w="612648"/>
+                <a:gridCol w="612648"/>
+                <a:gridCol w="1078992"/>
+                <a:gridCol w="923544"/>
+                <a:gridCol w="868680"/>
+                <a:gridCol w="923544"/>
+                <a:gridCol w="740664"/>
               </a:tblGrid>
-              <a:tr h="243840">
+              <a:tr h="221381">
                 <a:tc>
                   <a:txBody>
                     <a:bodyPr/>
@@ -1097,14 +2416,14 @@
                         <a:buNone/>
                       </a:pPr>
                       <a:r>
-                        <a:rPr lang="en-US" sz="900" b="1" dirty="0">
+                        <a:rPr lang="en-US" sz="750" b="1" dirty="0">
                           <a:solidFill>
                             <a:srgbClr val="FFFFFF"/>
                           </a:solidFill>
                         </a:rPr>
                         <a:t>층</a:t>
                       </a:r>
-                      <a:endParaRPr lang="en-US" sz="900" dirty="0"/>
+                      <a:endParaRPr lang="en-US" sz="750" dirty="0"/>
                     </a:p>
                   </a:txBody>
                   <a:tcPr marL="50800" marR="50800" marT="25400" marB="25400" anchor="ctr">
@@ -1158,14 +2477,14 @@
                         <a:buNone/>
                       </a:pPr>
                       <a:r>
-                        <a:rPr lang="en-US" sz="900" b="1" dirty="0">
+                        <a:rPr lang="en-US" sz="750" b="1" dirty="0">
                           <a:solidFill>
                             <a:srgbClr val="FFFFFF"/>
                           </a:solidFill>
                         </a:rPr>
                         <a:t>임차인</a:t>
                       </a:r>
-                      <a:endParaRPr lang="en-US" sz="900" dirty="0"/>
+                      <a:endParaRPr lang="en-US" sz="750" dirty="0"/>
                     </a:p>
                   </a:txBody>
                   <a:tcPr marL="50800" marR="50800" marT="25400" marB="25400" anchor="ctr">
@@ -1219,14 +2538,14 @@
                         <a:buNone/>
                       </a:pPr>
                       <a:r>
-                        <a:rPr lang="en-US" sz="900" b="1" dirty="0">
+                        <a:rPr lang="en-US" sz="750" b="1" dirty="0">
                           <a:solidFill>
                             <a:srgbClr val="FFFFFF"/>
                           </a:solidFill>
                         </a:rPr>
                         <a:t>용도</a:t>
                       </a:r>
-                      <a:endParaRPr lang="en-US" sz="900" dirty="0"/>
+                      <a:endParaRPr lang="en-US" sz="750" dirty="0"/>
                     </a:p>
                   </a:txBody>
                   <a:tcPr marL="50800" marR="50800" marT="25400" marB="25400" anchor="ctr">
@@ -1280,14 +2599,14 @@
                         <a:buNone/>
                       </a:pPr>
                       <a:r>
-                        <a:rPr lang="en-US" sz="900" b="1" dirty="0">
+                        <a:rPr lang="en-US" sz="750" b="1" dirty="0">
                           <a:solidFill>
                             <a:srgbClr val="FFFFFF"/>
                           </a:solidFill>
                         </a:rPr>
                         <a:t>임대면적</a:t>
                       </a:r>
-                      <a:endParaRPr lang="en-US" sz="900" dirty="0"/>
+                      <a:endParaRPr lang="en-US" sz="750" dirty="0"/>
                     </a:p>
                   </a:txBody>
                   <a:tcPr marL="50800" marR="50800" marT="25400" marB="25400" anchor="ctr">
@@ -1341,14 +2660,14 @@
                         <a:buNone/>
                       </a:pPr>
                       <a:r>
-                        <a:rPr lang="en-US" sz="900" b="1" dirty="0">
+                        <a:rPr lang="en-US" sz="750" b="1" dirty="0">
                           <a:solidFill>
                             <a:srgbClr val="FFFFFF"/>
                           </a:solidFill>
                         </a:rPr>
                         <a:t>전용면적</a:t>
                       </a:r>
-                      <a:endParaRPr lang="en-US" sz="900" dirty="0"/>
+                      <a:endParaRPr lang="en-US" sz="750" dirty="0"/>
                     </a:p>
                   </a:txBody>
                   <a:tcPr marL="50800" marR="50800" marT="25400" marB="25400" anchor="ctr">
@@ -1402,14 +2721,14 @@
                         <a:buNone/>
                       </a:pPr>
                       <a:r>
-                        <a:rPr lang="en-US" sz="900" b="1" dirty="0">
+                        <a:rPr lang="en-US" sz="750" b="1" dirty="0">
                           <a:solidFill>
                             <a:srgbClr val="FFFFFF"/>
                           </a:solidFill>
                         </a:rPr>
                         <a:t>보증금</a:t>
                       </a:r>
-                      <a:endParaRPr lang="en-US" sz="900" dirty="0"/>
+                      <a:endParaRPr lang="en-US" sz="750" dirty="0"/>
                     </a:p>
                   </a:txBody>
                   <a:tcPr marL="50800" marR="50800" marT="25400" marB="25400" anchor="ctr">
@@ -1463,14 +2782,14 @@
                         <a:buNone/>
                       </a:pPr>
                       <a:r>
-                        <a:rPr lang="en-US" sz="900" b="1" dirty="0">
+                        <a:rPr lang="en-US" sz="750" b="1" dirty="0">
                           <a:solidFill>
                             <a:srgbClr val="FFFFFF"/>
                           </a:solidFill>
                         </a:rPr>
                         <a:t>월임대료</a:t>
                       </a:r>
-                      <a:endParaRPr lang="en-US" sz="900" dirty="0"/>
+                      <a:endParaRPr lang="en-US" sz="750" dirty="0"/>
                     </a:p>
                   </a:txBody>
                   <a:tcPr marL="50800" marR="50800" marT="25400" marB="25400" anchor="ctr">
@@ -1524,14 +2843,14 @@
                         <a:buNone/>
                       </a:pPr>
                       <a:r>
-                        <a:rPr lang="en-US" sz="900" b="1" dirty="0">
+                        <a:rPr lang="en-US" sz="750" b="1" dirty="0">
                           <a:solidFill>
                             <a:srgbClr val="FFFFFF"/>
                           </a:solidFill>
                         </a:rPr>
                         <a:t>관리비</a:t>
                       </a:r>
-                      <a:endParaRPr lang="en-US" sz="900" dirty="0"/>
+                      <a:endParaRPr lang="en-US" sz="750" dirty="0"/>
                     </a:p>
                   </a:txBody>
                   <a:tcPr marL="50800" marR="50800" marT="25400" marB="25400" anchor="ctr">
@@ -1585,14 +2904,14 @@
                         <a:buNone/>
                       </a:pPr>
                       <a:r>
-                        <a:rPr lang="en-US" sz="900" b="1" dirty="0">
+                        <a:rPr lang="en-US" sz="750" b="1" dirty="0">
                           <a:solidFill>
                             <a:srgbClr val="FFFFFF"/>
                           </a:solidFill>
                         </a:rPr>
                         <a:t>월합계</a:t>
                       </a:r>
-                      <a:endParaRPr lang="en-US" sz="900" dirty="0"/>
+                      <a:endParaRPr lang="en-US" sz="750" dirty="0"/>
                     </a:p>
                   </a:txBody>
                   <a:tcPr marL="50800" marR="50800" marT="25400" marB="25400" anchor="ctr">
@@ -1646,14 +2965,14 @@
                         <a:buNone/>
                       </a:pPr>
                       <a:r>
-                        <a:rPr lang="en-US" sz="900" b="1" dirty="0">
+                        <a:rPr lang="en-US" sz="750" b="1" dirty="0">
                           <a:solidFill>
                             <a:srgbClr val="FFFFFF"/>
                           </a:solidFill>
                         </a:rPr>
                         <a:t>만기일</a:t>
                       </a:r>
-                      <a:endParaRPr lang="en-US" sz="900" dirty="0"/>
+                      <a:endParaRPr lang="en-US" sz="750" dirty="0"/>
                     </a:p>
                   </a:txBody>
                   <a:tcPr marL="50800" marR="50800" marT="25400" marB="25400" anchor="ctr">
@@ -1699,7 +3018,7 @@
                   </a:tcPr>
                 </a:tc>
               </a:tr>
-              <a:tr h="243840">
+              <a:tr h="221381">
                 <a:tc>
                   <a:txBody>
                     <a:bodyPr/>
@@ -1709,7 +3028,7 @@
                         <a:buNone/>
                       </a:pPr>
                       <a:r>
-                        <a:rPr lang="en-US" sz="750" dirty="0">
+                        <a:rPr lang="en-US" sz="700" dirty="0">
                           <a:solidFill>
                             <a:srgbClr val="2B2B2B"/>
                           </a:solidFill>
@@ -1719,7 +3038,7 @@
                         </a:rPr>
                         <a:t>18F</a:t>
                       </a:r>
-                      <a:endParaRPr lang="en-US" sz="750" dirty="0">
+                      <a:endParaRPr lang="en-US" sz="700" dirty="0">
                         <a:latin typeface="맑은 고딕" charset="0"/>
                         <a:ea typeface="맑은 고딕" charset="0"/>
                         <a:cs typeface="맑은 고딕" charset="0"/>
@@ -1785,7 +3104,7 @@
                           <a:ea typeface="맑은 고딕" pitchFamily="34" charset="-122"/>
                           <a:cs typeface="맑은 고딕" pitchFamily="34" charset="-120"/>
                         </a:rPr>
-                        <a:t>한국글로벌자산운용…</a:t>
+                        <a:t>한국글로벌자산운용_18층_본사사업부</a:t>
                       </a:r>
                       <a:endParaRPr lang="en-US" sz="700" dirty="0">
                         <a:latin typeface="맑은 고딕" charset="0"/>
@@ -1845,7 +3164,7 @@
                         <a:buNone/>
                       </a:pPr>
                       <a:r>
-                        <a:rPr lang="en-US" sz="750" dirty="0">
+                        <a:rPr lang="en-US" sz="700" dirty="0">
                           <a:solidFill>
                             <a:srgbClr val="2B2B2B"/>
                           </a:solidFill>
@@ -1855,7 +3174,7 @@
                         </a:rPr>
                         <a:t>업무시설</a:t>
                       </a:r>
-                      <a:endParaRPr lang="en-US" sz="750" dirty="0">
+                      <a:endParaRPr lang="en-US" sz="700" dirty="0">
                         <a:latin typeface="맑은 고딕" charset="0"/>
                         <a:ea typeface="맑은 고딕" charset="0"/>
                         <a:cs typeface="맑은 고딕" charset="0"/>
@@ -1913,7 +3232,7 @@
                         <a:buNone/>
                       </a:pPr>
                       <a:r>
-                        <a:rPr lang="en-US" sz="750" dirty="0">
+                        <a:rPr lang="en-US" sz="700" dirty="0">
                           <a:solidFill>
                             <a:srgbClr val="2B2B2B"/>
                           </a:solidFill>
@@ -1923,7 +3242,7 @@
                         </a:rPr>
                         <a:t>1,250.5</a:t>
                       </a:r>
-                      <a:endParaRPr lang="en-US" sz="750" dirty="0">
+                      <a:endParaRPr lang="en-US" sz="700" dirty="0">
                         <a:latin typeface="맑은 고딕" charset="0"/>
                         <a:ea typeface="맑은 고딕" charset="0"/>
                         <a:cs typeface="맑은 고딕" charset="0"/>
@@ -1981,7 +3300,7 @@
                         <a:buNone/>
                       </a:pPr>
                       <a:r>
-                        <a:rPr lang="en-US" sz="750" dirty="0">
+                        <a:rPr lang="en-US" sz="700" dirty="0">
                           <a:solidFill>
                             <a:srgbClr val="2B2B2B"/>
                           </a:solidFill>
@@ -1991,7 +3310,7 @@
                         </a:rPr>
                         <a:t>750.3</a:t>
                       </a:r>
-                      <a:endParaRPr lang="en-US" sz="750" dirty="0">
+                      <a:endParaRPr lang="en-US" sz="700" dirty="0">
                         <a:latin typeface="맑은 고딕" charset="0"/>
                         <a:ea typeface="맑은 고딕" charset="0"/>
                         <a:cs typeface="맑은 고딕" charset="0"/>
@@ -2057,7 +3376,7 @@
                           <a:ea typeface="맑은 고딕" pitchFamily="34" charset="-122"/>
                           <a:cs typeface="맑은 고딕" pitchFamily="34" charset="-120"/>
                         </a:rPr>
-                        <a:t>150,000,000,…</a:t>
+                        <a:t>150,000,000,000</a:t>
                       </a:r>
                       <a:endParaRPr lang="en-US" sz="700" dirty="0">
                         <a:latin typeface="맑은 고딕" charset="0"/>
@@ -2185,7 +3504,7 @@
                         <a:buNone/>
                       </a:pPr>
                       <a:r>
-                        <a:rPr lang="en-US" sz="750" dirty="0">
+                        <a:rPr lang="en-US" sz="700" dirty="0">
                           <a:solidFill>
                             <a:srgbClr val="2B2B2B"/>
                           </a:solidFill>
@@ -2195,7 +3514,7 @@
                         </a:rPr>
                         <a:t>150,000,000</a:t>
                       </a:r>
-                      <a:endParaRPr lang="en-US" sz="750" dirty="0">
+                      <a:endParaRPr lang="en-US" sz="700" dirty="0">
                         <a:latin typeface="맑은 고딕" charset="0"/>
                         <a:ea typeface="맑은 고딕" charset="0"/>
                         <a:cs typeface="맑은 고딕" charset="0"/>
@@ -2321,7 +3640,7 @@
                         <a:buNone/>
                       </a:pPr>
                       <a:r>
-                        <a:rPr lang="en-US" sz="750" dirty="0">
+                        <a:rPr lang="en-US" sz="700" dirty="0">
                           <a:solidFill>
                             <a:srgbClr val="2B2B2B"/>
                           </a:solidFill>
@@ -2331,7 +3650,7 @@
                         </a:rPr>
                         <a:t>2028-12-31</a:t>
                       </a:r>
-                      <a:endParaRPr lang="en-US" sz="750" dirty="0">
+                      <a:endParaRPr lang="en-US" sz="700" dirty="0">
                         <a:latin typeface="맑은 고딕" charset="0"/>
                         <a:ea typeface="맑은 고딕" charset="0"/>
                         <a:cs typeface="맑은 고딕" charset="0"/>
@@ -2381,7 +3700,7 @@
                   </a:tcPr>
                 </a:tc>
               </a:tr>
-              <a:tr h="243840">
+              <a:tr h="221381">
                 <a:tc>
                   <a:txBody>
                     <a:bodyPr/>
@@ -2391,7 +3710,7 @@
                         <a:buNone/>
                       </a:pPr>
                       <a:r>
-                        <a:rPr lang="en-US" sz="750" dirty="0">
+                        <a:rPr lang="en-US" sz="700" dirty="0">
                           <a:solidFill>
                             <a:srgbClr val="2B2B2B"/>
                           </a:solidFill>
@@ -2401,7 +3720,7 @@
                         </a:rPr>
                         <a:t>17F</a:t>
                       </a:r>
-                      <a:endParaRPr lang="en-US" sz="750" dirty="0">
+                      <a:endParaRPr lang="en-US" sz="700" dirty="0">
                         <a:latin typeface="맑은 고딕" charset="0"/>
                         <a:ea typeface="맑은 고딕" charset="0"/>
                         <a:cs typeface="맑은 고딕" charset="0"/>
@@ -2467,7 +3786,7 @@
                           <a:ea typeface="맑은 고딕" pitchFamily="34" charset="-122"/>
                           <a:cs typeface="맑은 고딕" pitchFamily="34" charset="-120"/>
                         </a:rPr>
-                        <a:t>한국글로벌자산운용…</a:t>
+                        <a:t>한국글로벌자산운용_17층_본사사업부</a:t>
                       </a:r>
                       <a:endParaRPr lang="en-US" sz="700" dirty="0">
                         <a:latin typeface="맑은 고딕" charset="0"/>
@@ -2527,7 +3846,7 @@
                         <a:buNone/>
                       </a:pPr>
                       <a:r>
-                        <a:rPr lang="en-US" sz="750" dirty="0">
+                        <a:rPr lang="en-US" sz="700" dirty="0">
                           <a:solidFill>
                             <a:srgbClr val="2B2B2B"/>
                           </a:solidFill>
@@ -2537,7 +3856,7 @@
                         </a:rPr>
                         <a:t>업무시설</a:t>
                       </a:r>
-                      <a:endParaRPr lang="en-US" sz="750" dirty="0">
+                      <a:endParaRPr lang="en-US" sz="700" dirty="0">
                         <a:latin typeface="맑은 고딕" charset="0"/>
                         <a:ea typeface="맑은 고딕" charset="0"/>
                         <a:cs typeface="맑은 고딕" charset="0"/>
@@ -2595,7 +3914,7 @@
                         <a:buNone/>
                       </a:pPr>
                       <a:r>
-                        <a:rPr lang="en-US" sz="750" dirty="0">
+                        <a:rPr lang="en-US" sz="700" dirty="0">
                           <a:solidFill>
                             <a:srgbClr val="2B2B2B"/>
                           </a:solidFill>
@@ -2605,7 +3924,7 @@
                         </a:rPr>
                         <a:t>1,250.5</a:t>
                       </a:r>
-                      <a:endParaRPr lang="en-US" sz="750" dirty="0">
+                      <a:endParaRPr lang="en-US" sz="700" dirty="0">
                         <a:latin typeface="맑은 고딕" charset="0"/>
                         <a:ea typeface="맑은 고딕" charset="0"/>
                         <a:cs typeface="맑은 고딕" charset="0"/>
@@ -2663,7 +3982,7 @@
                         <a:buNone/>
                       </a:pPr>
                       <a:r>
-                        <a:rPr lang="en-US" sz="750" dirty="0">
+                        <a:rPr lang="en-US" sz="700" dirty="0">
                           <a:solidFill>
                             <a:srgbClr val="2B2B2B"/>
                           </a:solidFill>
@@ -2673,7 +3992,7 @@
                         </a:rPr>
                         <a:t>750.3</a:t>
                       </a:r>
-                      <a:endParaRPr lang="en-US" sz="750" dirty="0">
+                      <a:endParaRPr lang="en-US" sz="700" dirty="0">
                         <a:latin typeface="맑은 고딕" charset="0"/>
                         <a:ea typeface="맑은 고딕" charset="0"/>
                         <a:cs typeface="맑은 고딕" charset="0"/>
@@ -2739,7 +4058,7 @@
                           <a:ea typeface="맑은 고딕" pitchFamily="34" charset="-122"/>
                           <a:cs typeface="맑은 고딕" pitchFamily="34" charset="-120"/>
                         </a:rPr>
-                        <a:t>150,000,000,…</a:t>
+                        <a:t>150,000,000,000</a:t>
                       </a:r>
                       <a:endParaRPr lang="en-US" sz="700" dirty="0">
                         <a:latin typeface="맑은 고딕" charset="0"/>
@@ -2867,7 +4186,7 @@
                         <a:buNone/>
                       </a:pPr>
                       <a:r>
-                        <a:rPr lang="en-US" sz="750" dirty="0">
+                        <a:rPr lang="en-US" sz="700" dirty="0">
                           <a:solidFill>
                             <a:srgbClr val="2B2B2B"/>
                           </a:solidFill>
@@ -2877,7 +4196,7 @@
                         </a:rPr>
                         <a:t>150,000,000</a:t>
                       </a:r>
-                      <a:endParaRPr lang="en-US" sz="750" dirty="0">
+                      <a:endParaRPr lang="en-US" sz="700" dirty="0">
                         <a:latin typeface="맑은 고딕" charset="0"/>
                         <a:ea typeface="맑은 고딕" charset="0"/>
                         <a:cs typeface="맑은 고딕" charset="0"/>
@@ -3003,7 +4322,7 @@
                         <a:buNone/>
                       </a:pPr>
                       <a:r>
-                        <a:rPr lang="en-US" sz="750" dirty="0">
+                        <a:rPr lang="en-US" sz="700" dirty="0">
                           <a:solidFill>
                             <a:srgbClr val="2B2B2B"/>
                           </a:solidFill>
@@ -3013,7 +4332,7 @@
                         </a:rPr>
                         <a:t>2028-12-31</a:t>
                       </a:r>
-                      <a:endParaRPr lang="en-US" sz="750" dirty="0">
+                      <a:endParaRPr lang="en-US" sz="700" dirty="0">
                         <a:latin typeface="맑은 고딕" charset="0"/>
                         <a:ea typeface="맑은 고딕" charset="0"/>
                         <a:cs typeface="맑은 고딕" charset="0"/>
@@ -3063,7 +4382,7 @@
                   </a:tcPr>
                 </a:tc>
               </a:tr>
-              <a:tr h="243840">
+              <a:tr h="221381">
                 <a:tc>
                   <a:txBody>
                     <a:bodyPr/>
@@ -3073,7 +4392,7 @@
                         <a:buNone/>
                       </a:pPr>
                       <a:r>
-                        <a:rPr lang="en-US" sz="750" dirty="0">
+                        <a:rPr lang="en-US" sz="700" dirty="0">
                           <a:solidFill>
                             <a:srgbClr val="2B2B2B"/>
                           </a:solidFill>
@@ -3083,7 +4402,7 @@
                         </a:rPr>
                         <a:t>16F</a:t>
                       </a:r>
-                      <a:endParaRPr lang="en-US" sz="750" dirty="0">
+                      <a:endParaRPr lang="en-US" sz="700" dirty="0">
                         <a:latin typeface="맑은 고딕" charset="0"/>
                         <a:ea typeface="맑은 고딕" charset="0"/>
                         <a:cs typeface="맑은 고딕" charset="0"/>
@@ -3149,7 +4468,7 @@
                           <a:ea typeface="맑은 고딕" pitchFamily="34" charset="-122"/>
                           <a:cs typeface="맑은 고딕" pitchFamily="34" charset="-120"/>
                         </a:rPr>
-                        <a:t>한국글로벌자산운용…</a:t>
+                        <a:t>한국글로벌자산운용_16층_본사사업부</a:t>
                       </a:r>
                       <a:endParaRPr lang="en-US" sz="700" dirty="0">
                         <a:latin typeface="맑은 고딕" charset="0"/>
@@ -3209,7 +4528,7 @@
                         <a:buNone/>
                       </a:pPr>
                       <a:r>
-                        <a:rPr lang="en-US" sz="750" dirty="0">
+                        <a:rPr lang="en-US" sz="700" dirty="0">
                           <a:solidFill>
                             <a:srgbClr val="2B2B2B"/>
                           </a:solidFill>
@@ -3219,7 +4538,7 @@
                         </a:rPr>
                         <a:t>업무시설</a:t>
                       </a:r>
-                      <a:endParaRPr lang="en-US" sz="750" dirty="0">
+                      <a:endParaRPr lang="en-US" sz="700" dirty="0">
                         <a:latin typeface="맑은 고딕" charset="0"/>
                         <a:ea typeface="맑은 고딕" charset="0"/>
                         <a:cs typeface="맑은 고딕" charset="0"/>
@@ -3277,7 +4596,7 @@
                         <a:buNone/>
                       </a:pPr>
                       <a:r>
-                        <a:rPr lang="en-US" sz="750" dirty="0">
+                        <a:rPr lang="en-US" sz="700" dirty="0">
                           <a:solidFill>
                             <a:srgbClr val="2B2B2B"/>
                           </a:solidFill>
@@ -3287,7 +4606,7 @@
                         </a:rPr>
                         <a:t>1,250.5</a:t>
                       </a:r>
-                      <a:endParaRPr lang="en-US" sz="750" dirty="0">
+                      <a:endParaRPr lang="en-US" sz="700" dirty="0">
                         <a:latin typeface="맑은 고딕" charset="0"/>
                         <a:ea typeface="맑은 고딕" charset="0"/>
                         <a:cs typeface="맑은 고딕" charset="0"/>
@@ -3345,7 +4664,7 @@
                         <a:buNone/>
                       </a:pPr>
                       <a:r>
-                        <a:rPr lang="en-US" sz="750" dirty="0">
+                        <a:rPr lang="en-US" sz="700" dirty="0">
                           <a:solidFill>
                             <a:srgbClr val="2B2B2B"/>
                           </a:solidFill>
@@ -3355,7 +4674,7 @@
                         </a:rPr>
                         <a:t>750.3</a:t>
                       </a:r>
-                      <a:endParaRPr lang="en-US" sz="750" dirty="0">
+                      <a:endParaRPr lang="en-US" sz="700" dirty="0">
                         <a:latin typeface="맑은 고딕" charset="0"/>
                         <a:ea typeface="맑은 고딕" charset="0"/>
                         <a:cs typeface="맑은 고딕" charset="0"/>
@@ -3421,7 +4740,7 @@
                           <a:ea typeface="맑은 고딕" pitchFamily="34" charset="-122"/>
                           <a:cs typeface="맑은 고딕" pitchFamily="34" charset="-120"/>
                         </a:rPr>
-                        <a:t>150,000,000,…</a:t>
+                        <a:t>150,000,000,000</a:t>
                       </a:r>
                       <a:endParaRPr lang="en-US" sz="700" dirty="0">
                         <a:latin typeface="맑은 고딕" charset="0"/>
@@ -3549,7 +4868,7 @@
                         <a:buNone/>
                       </a:pPr>
                       <a:r>
-                        <a:rPr lang="en-US" sz="750" dirty="0">
+                        <a:rPr lang="en-US" sz="700" dirty="0">
                           <a:solidFill>
                             <a:srgbClr val="2B2B2B"/>
                           </a:solidFill>
@@ -3559,7 +4878,7 @@
                         </a:rPr>
                         <a:t>150,000,000</a:t>
                       </a:r>
-                      <a:endParaRPr lang="en-US" sz="750" dirty="0">
+                      <a:endParaRPr lang="en-US" sz="700" dirty="0">
                         <a:latin typeface="맑은 고딕" charset="0"/>
                         <a:ea typeface="맑은 고딕" charset="0"/>
                         <a:cs typeface="맑은 고딕" charset="0"/>
@@ -3685,7 +5004,7 @@
                         <a:buNone/>
                       </a:pPr>
                       <a:r>
-                        <a:rPr lang="en-US" sz="750" dirty="0">
+                        <a:rPr lang="en-US" sz="700" dirty="0">
                           <a:solidFill>
                             <a:srgbClr val="2B2B2B"/>
                           </a:solidFill>
@@ -3695,7 +5014,7 @@
                         </a:rPr>
                         <a:t>2028-12-31</a:t>
                       </a:r>
-                      <a:endParaRPr lang="en-US" sz="750" dirty="0">
+                      <a:endParaRPr lang="en-US" sz="700" dirty="0">
                         <a:latin typeface="맑은 고딕" charset="0"/>
                         <a:ea typeface="맑은 고딕" charset="0"/>
                         <a:cs typeface="맑은 고딕" charset="0"/>
@@ -3745,7 +5064,7 @@
                   </a:tcPr>
                 </a:tc>
               </a:tr>
-              <a:tr h="243840">
+              <a:tr h="221381">
                 <a:tc>
                   <a:txBody>
                     <a:bodyPr/>
@@ -3755,7 +5074,7 @@
                         <a:buNone/>
                       </a:pPr>
                       <a:r>
-                        <a:rPr lang="en-US" sz="750" dirty="0">
+                        <a:rPr lang="en-US" sz="700" dirty="0">
                           <a:solidFill>
                             <a:srgbClr val="2B2B2B"/>
                           </a:solidFill>
@@ -3765,7 +5084,7 @@
                         </a:rPr>
                         <a:t>15F</a:t>
                       </a:r>
-                      <a:endParaRPr lang="en-US" sz="750" dirty="0">
+                      <a:endParaRPr lang="en-US" sz="700" dirty="0">
                         <a:latin typeface="맑은 고딕" charset="0"/>
                         <a:ea typeface="맑은 고딕" charset="0"/>
                         <a:cs typeface="맑은 고딕" charset="0"/>
@@ -3831,7 +5150,7 @@
                           <a:ea typeface="맑은 고딕" pitchFamily="34" charset="-122"/>
                           <a:cs typeface="맑은 고딕" pitchFamily="34" charset="-120"/>
                         </a:rPr>
-                        <a:t>한국글로벌자산운용…</a:t>
+                        <a:t>한국글로벌자산운용_15층_본사사업부</a:t>
                       </a:r>
                       <a:endParaRPr lang="en-US" sz="700" dirty="0">
                         <a:latin typeface="맑은 고딕" charset="0"/>
@@ -3891,7 +5210,7 @@
                         <a:buNone/>
                       </a:pPr>
                       <a:r>
-                        <a:rPr lang="en-US" sz="750" dirty="0">
+                        <a:rPr lang="en-US" sz="700" dirty="0">
                           <a:solidFill>
                             <a:srgbClr val="2B2B2B"/>
                           </a:solidFill>
@@ -3901,7 +5220,7 @@
                         </a:rPr>
                         <a:t>업무시설</a:t>
                       </a:r>
-                      <a:endParaRPr lang="en-US" sz="750" dirty="0">
+                      <a:endParaRPr lang="en-US" sz="700" dirty="0">
                         <a:latin typeface="맑은 고딕" charset="0"/>
                         <a:ea typeface="맑은 고딕" charset="0"/>
                         <a:cs typeface="맑은 고딕" charset="0"/>
@@ -3959,7 +5278,7 @@
                         <a:buNone/>
                       </a:pPr>
                       <a:r>
-                        <a:rPr lang="en-US" sz="750" dirty="0">
+                        <a:rPr lang="en-US" sz="700" dirty="0">
                           <a:solidFill>
                             <a:srgbClr val="2B2B2B"/>
                           </a:solidFill>
@@ -3969,7 +5288,7 @@
                         </a:rPr>
                         <a:t>1,250.5</a:t>
                       </a:r>
-                      <a:endParaRPr lang="en-US" sz="750" dirty="0">
+                      <a:endParaRPr lang="en-US" sz="700" dirty="0">
                         <a:latin typeface="맑은 고딕" charset="0"/>
                         <a:ea typeface="맑은 고딕" charset="0"/>
                         <a:cs typeface="맑은 고딕" charset="0"/>
@@ -4027,7 +5346,7 @@
                         <a:buNone/>
                       </a:pPr>
                       <a:r>
-                        <a:rPr lang="en-US" sz="750" dirty="0">
+                        <a:rPr lang="en-US" sz="700" dirty="0">
                           <a:solidFill>
                             <a:srgbClr val="2B2B2B"/>
                           </a:solidFill>
@@ -4037,7 +5356,7 @@
                         </a:rPr>
                         <a:t>750.3</a:t>
                       </a:r>
-                      <a:endParaRPr lang="en-US" sz="750" dirty="0">
+                      <a:endParaRPr lang="en-US" sz="700" dirty="0">
                         <a:latin typeface="맑은 고딕" charset="0"/>
                         <a:ea typeface="맑은 고딕" charset="0"/>
                         <a:cs typeface="맑은 고딕" charset="0"/>
@@ -4103,7 +5422,7 @@
                           <a:ea typeface="맑은 고딕" pitchFamily="34" charset="-122"/>
                           <a:cs typeface="맑은 고딕" pitchFamily="34" charset="-120"/>
                         </a:rPr>
-                        <a:t>150,000,000,…</a:t>
+                        <a:t>150,000,000,000</a:t>
                       </a:r>
                       <a:endParaRPr lang="en-US" sz="700" dirty="0">
                         <a:latin typeface="맑은 고딕" charset="0"/>
@@ -4231,7 +5550,7 @@
                         <a:buNone/>
                       </a:pPr>
                       <a:r>
-                        <a:rPr lang="en-US" sz="750" dirty="0">
+                        <a:rPr lang="en-US" sz="700" dirty="0">
                           <a:solidFill>
                             <a:srgbClr val="2B2B2B"/>
                           </a:solidFill>
@@ -4241,7 +5560,7 @@
                         </a:rPr>
                         <a:t>150,000,000</a:t>
                       </a:r>
-                      <a:endParaRPr lang="en-US" sz="750" dirty="0">
+                      <a:endParaRPr lang="en-US" sz="700" dirty="0">
                         <a:latin typeface="맑은 고딕" charset="0"/>
                         <a:ea typeface="맑은 고딕" charset="0"/>
                         <a:cs typeface="맑은 고딕" charset="0"/>
@@ -4367,7 +5686,7 @@
                         <a:buNone/>
                       </a:pPr>
                       <a:r>
-                        <a:rPr lang="en-US" sz="750" dirty="0">
+                        <a:rPr lang="en-US" sz="700" dirty="0">
                           <a:solidFill>
                             <a:srgbClr val="2B2B2B"/>
                           </a:solidFill>
@@ -4377,7 +5696,7 @@
                         </a:rPr>
                         <a:t>2028-12-31</a:t>
                       </a:r>
-                      <a:endParaRPr lang="en-US" sz="750" dirty="0">
+                      <a:endParaRPr lang="en-US" sz="700" dirty="0">
                         <a:latin typeface="맑은 고딕" charset="0"/>
                         <a:ea typeface="맑은 고딕" charset="0"/>
                         <a:cs typeface="맑은 고딕" charset="0"/>
@@ -4427,7 +5746,7 @@
                   </a:tcPr>
                 </a:tc>
               </a:tr>
-              <a:tr h="243840">
+              <a:tr h="221381">
                 <a:tc>
                   <a:txBody>
                     <a:bodyPr/>
@@ -4437,7 +5756,7 @@
                         <a:buNone/>
                       </a:pPr>
                       <a:r>
-                        <a:rPr lang="en-US" sz="750" dirty="0">
+                        <a:rPr lang="en-US" sz="700" dirty="0">
                           <a:solidFill>
                             <a:srgbClr val="2B2B2B"/>
                           </a:solidFill>
@@ -4447,7 +5766,7 @@
                         </a:rPr>
                         <a:t>14F</a:t>
                       </a:r>
-                      <a:endParaRPr lang="en-US" sz="750" dirty="0">
+                      <a:endParaRPr lang="en-US" sz="700" dirty="0">
                         <a:latin typeface="맑은 고딕" charset="0"/>
                         <a:ea typeface="맑은 고딕" charset="0"/>
                         <a:cs typeface="맑은 고딕" charset="0"/>
@@ -4513,7 +5832,7 @@
                           <a:ea typeface="맑은 고딕" pitchFamily="34" charset="-122"/>
                           <a:cs typeface="맑은 고딕" pitchFamily="34" charset="-120"/>
                         </a:rPr>
-                        <a:t>한국글로벌자산운용…</a:t>
+                        <a:t>한국글로벌자산운용_14층_본사사업부</a:t>
                       </a:r>
                       <a:endParaRPr lang="en-US" sz="700" dirty="0">
                         <a:latin typeface="맑은 고딕" charset="0"/>
@@ -4573,7 +5892,7 @@
                         <a:buNone/>
                       </a:pPr>
                       <a:r>
-                        <a:rPr lang="en-US" sz="750" dirty="0">
+                        <a:rPr lang="en-US" sz="700" dirty="0">
                           <a:solidFill>
                             <a:srgbClr val="2B2B2B"/>
                           </a:solidFill>
@@ -4583,7 +5902,7 @@
                         </a:rPr>
                         <a:t>업무시설</a:t>
                       </a:r>
-                      <a:endParaRPr lang="en-US" sz="750" dirty="0">
+                      <a:endParaRPr lang="en-US" sz="700" dirty="0">
                         <a:latin typeface="맑은 고딕" charset="0"/>
                         <a:ea typeface="맑은 고딕" charset="0"/>
                         <a:cs typeface="맑은 고딕" charset="0"/>
@@ -4641,7 +5960,7 @@
                         <a:buNone/>
                       </a:pPr>
                       <a:r>
-                        <a:rPr lang="en-US" sz="750" dirty="0">
+                        <a:rPr lang="en-US" sz="700" dirty="0">
                           <a:solidFill>
                             <a:srgbClr val="2B2B2B"/>
                           </a:solidFill>
@@ -4651,7 +5970,7 @@
                         </a:rPr>
                         <a:t>1,250.5</a:t>
                       </a:r>
-                      <a:endParaRPr lang="en-US" sz="750" dirty="0">
+                      <a:endParaRPr lang="en-US" sz="700" dirty="0">
                         <a:latin typeface="맑은 고딕" charset="0"/>
                         <a:ea typeface="맑은 고딕" charset="0"/>
                         <a:cs typeface="맑은 고딕" charset="0"/>
@@ -4709,7 +6028,7 @@
                         <a:buNone/>
                       </a:pPr>
                       <a:r>
-                        <a:rPr lang="en-US" sz="750" dirty="0">
+                        <a:rPr lang="en-US" sz="700" dirty="0">
                           <a:solidFill>
                             <a:srgbClr val="2B2B2B"/>
                           </a:solidFill>
@@ -4719,7 +6038,7 @@
                         </a:rPr>
                         <a:t>750.3</a:t>
                       </a:r>
-                      <a:endParaRPr lang="en-US" sz="750" dirty="0">
+                      <a:endParaRPr lang="en-US" sz="700" dirty="0">
                         <a:latin typeface="맑은 고딕" charset="0"/>
                         <a:ea typeface="맑은 고딕" charset="0"/>
                         <a:cs typeface="맑은 고딕" charset="0"/>
@@ -4785,7 +6104,7 @@
                           <a:ea typeface="맑은 고딕" pitchFamily="34" charset="-122"/>
                           <a:cs typeface="맑은 고딕" pitchFamily="34" charset="-120"/>
                         </a:rPr>
-                        <a:t>150,000,000,…</a:t>
+                        <a:t>150,000,000,000</a:t>
                       </a:r>
                       <a:endParaRPr lang="en-US" sz="700" dirty="0">
                         <a:latin typeface="맑은 고딕" charset="0"/>
@@ -4913,7 +6232,7 @@
                         <a:buNone/>
                       </a:pPr>
                       <a:r>
-                        <a:rPr lang="en-US" sz="750" dirty="0">
+                        <a:rPr lang="en-US" sz="700" dirty="0">
                           <a:solidFill>
                             <a:srgbClr val="2B2B2B"/>
                           </a:solidFill>
@@ -4923,7 +6242,7 @@
                         </a:rPr>
                         <a:t>150,000,000</a:t>
                       </a:r>
-                      <a:endParaRPr lang="en-US" sz="750" dirty="0">
+                      <a:endParaRPr lang="en-US" sz="700" dirty="0">
                         <a:latin typeface="맑은 고딕" charset="0"/>
                         <a:ea typeface="맑은 고딕" charset="0"/>
                         <a:cs typeface="맑은 고딕" charset="0"/>
@@ -5049,7 +6368,7 @@
                         <a:buNone/>
                       </a:pPr>
                       <a:r>
-                        <a:rPr lang="en-US" sz="750" dirty="0">
+                        <a:rPr lang="en-US" sz="700" dirty="0">
                           <a:solidFill>
                             <a:srgbClr val="2B2B2B"/>
                           </a:solidFill>
@@ -5059,7 +6378,7 @@
                         </a:rPr>
                         <a:t>2028-12-31</a:t>
                       </a:r>
-                      <a:endParaRPr lang="en-US" sz="750" dirty="0">
+                      <a:endParaRPr lang="en-US" sz="700" dirty="0">
                         <a:latin typeface="맑은 고딕" charset="0"/>
                         <a:ea typeface="맑은 고딕" charset="0"/>
                         <a:cs typeface="맑은 고딕" charset="0"/>
@@ -5109,7 +6428,7 @@
                   </a:tcPr>
                 </a:tc>
               </a:tr>
-              <a:tr h="243840">
+              <a:tr h="221381">
                 <a:tc>
                   <a:txBody>
                     <a:bodyPr/>
@@ -5119,7 +6438,7 @@
                         <a:buNone/>
                       </a:pPr>
                       <a:r>
-                        <a:rPr lang="en-US" sz="750" dirty="0">
+                        <a:rPr lang="en-US" sz="700" dirty="0">
                           <a:solidFill>
                             <a:srgbClr val="2B2B2B"/>
                           </a:solidFill>
@@ -5129,7 +6448,7 @@
                         </a:rPr>
                         <a:t>13F</a:t>
                       </a:r>
-                      <a:endParaRPr lang="en-US" sz="750" dirty="0">
+                      <a:endParaRPr lang="en-US" sz="700" dirty="0">
                         <a:latin typeface="맑은 고딕" charset="0"/>
                         <a:ea typeface="맑은 고딕" charset="0"/>
                         <a:cs typeface="맑은 고딕" charset="0"/>
@@ -5195,7 +6514,7 @@
                           <a:ea typeface="맑은 고딕" pitchFamily="34" charset="-122"/>
                           <a:cs typeface="맑은 고딕" pitchFamily="34" charset="-120"/>
                         </a:rPr>
-                        <a:t>한국글로벌자산운용…</a:t>
+                        <a:t>한국글로벌자산운용_13층_본사사업부</a:t>
                       </a:r>
                       <a:endParaRPr lang="en-US" sz="700" dirty="0">
                         <a:latin typeface="맑은 고딕" charset="0"/>
@@ -5255,7 +6574,7 @@
                         <a:buNone/>
                       </a:pPr>
                       <a:r>
-                        <a:rPr lang="en-US" sz="750" dirty="0">
+                        <a:rPr lang="en-US" sz="700" dirty="0">
                           <a:solidFill>
                             <a:srgbClr val="2B2B2B"/>
                           </a:solidFill>
@@ -5265,7 +6584,7 @@
                         </a:rPr>
                         <a:t>업무시설</a:t>
                       </a:r>
-                      <a:endParaRPr lang="en-US" sz="750" dirty="0">
+                      <a:endParaRPr lang="en-US" sz="700" dirty="0">
                         <a:latin typeface="맑은 고딕" charset="0"/>
                         <a:ea typeface="맑은 고딕" charset="0"/>
                         <a:cs typeface="맑은 고딕" charset="0"/>
@@ -5323,7 +6642,7 @@
                         <a:buNone/>
                       </a:pPr>
                       <a:r>
-                        <a:rPr lang="en-US" sz="750" dirty="0">
+                        <a:rPr lang="en-US" sz="700" dirty="0">
                           <a:solidFill>
                             <a:srgbClr val="2B2B2B"/>
                           </a:solidFill>
@@ -5333,7 +6652,7 @@
                         </a:rPr>
                         <a:t>1,250.5</a:t>
                       </a:r>
-                      <a:endParaRPr lang="en-US" sz="750" dirty="0">
+                      <a:endParaRPr lang="en-US" sz="700" dirty="0">
                         <a:latin typeface="맑은 고딕" charset="0"/>
                         <a:ea typeface="맑은 고딕" charset="0"/>
                         <a:cs typeface="맑은 고딕" charset="0"/>
@@ -5391,7 +6710,7 @@
                         <a:buNone/>
                       </a:pPr>
                       <a:r>
-                        <a:rPr lang="en-US" sz="750" dirty="0">
+                        <a:rPr lang="en-US" sz="700" dirty="0">
                           <a:solidFill>
                             <a:srgbClr val="2B2B2B"/>
                           </a:solidFill>
@@ -5401,7 +6720,7 @@
                         </a:rPr>
                         <a:t>750.3</a:t>
                       </a:r>
-                      <a:endParaRPr lang="en-US" sz="750" dirty="0">
+                      <a:endParaRPr lang="en-US" sz="700" dirty="0">
                         <a:latin typeface="맑은 고딕" charset="0"/>
                         <a:ea typeface="맑은 고딕" charset="0"/>
                         <a:cs typeface="맑은 고딕" charset="0"/>
@@ -5467,7 +6786,7 @@
                           <a:ea typeface="맑은 고딕" pitchFamily="34" charset="-122"/>
                           <a:cs typeface="맑은 고딕" pitchFamily="34" charset="-120"/>
                         </a:rPr>
-                        <a:t>150,000,000,…</a:t>
+                        <a:t>150,000,000,000</a:t>
                       </a:r>
                       <a:endParaRPr lang="en-US" sz="700" dirty="0">
                         <a:latin typeface="맑은 고딕" charset="0"/>
@@ -5595,7 +6914,7 @@
                         <a:buNone/>
                       </a:pPr>
                       <a:r>
-                        <a:rPr lang="en-US" sz="750" dirty="0">
+                        <a:rPr lang="en-US" sz="700" dirty="0">
                           <a:solidFill>
                             <a:srgbClr val="2B2B2B"/>
                           </a:solidFill>
@@ -5605,7 +6924,7 @@
                         </a:rPr>
                         <a:t>150,000,000</a:t>
                       </a:r>
-                      <a:endParaRPr lang="en-US" sz="750" dirty="0">
+                      <a:endParaRPr lang="en-US" sz="700" dirty="0">
                         <a:latin typeface="맑은 고딕" charset="0"/>
                         <a:ea typeface="맑은 고딕" charset="0"/>
                         <a:cs typeface="맑은 고딕" charset="0"/>
@@ -5731,7 +7050,7 @@
                         <a:buNone/>
                       </a:pPr>
                       <a:r>
-                        <a:rPr lang="en-US" sz="750" dirty="0">
+                        <a:rPr lang="en-US" sz="700" dirty="0">
                           <a:solidFill>
                             <a:srgbClr val="2B2B2B"/>
                           </a:solidFill>
@@ -5741,7 +7060,7 @@
                         </a:rPr>
                         <a:t>2028-12-31</a:t>
                       </a:r>
-                      <a:endParaRPr lang="en-US" sz="750" dirty="0">
+                      <a:endParaRPr lang="en-US" sz="700" dirty="0">
                         <a:latin typeface="맑은 고딕" charset="0"/>
                         <a:ea typeface="맑은 고딕" charset="0"/>
                         <a:cs typeface="맑은 고딕" charset="0"/>
@@ -5791,7 +7110,7 @@
                   </a:tcPr>
                 </a:tc>
               </a:tr>
-              <a:tr h="243840">
+              <a:tr h="221381">
                 <a:tc>
                   <a:txBody>
                     <a:bodyPr/>
@@ -5801,7 +7120,7 @@
                         <a:buNone/>
                       </a:pPr>
                       <a:r>
-                        <a:rPr lang="en-US" sz="750" dirty="0">
+                        <a:rPr lang="en-US" sz="700" dirty="0">
                           <a:solidFill>
                             <a:srgbClr val="2B2B2B"/>
                           </a:solidFill>
@@ -5811,7 +7130,7 @@
                         </a:rPr>
                         <a:t>12F</a:t>
                       </a:r>
-                      <a:endParaRPr lang="en-US" sz="750" dirty="0">
+                      <a:endParaRPr lang="en-US" sz="700" dirty="0">
                         <a:latin typeface="맑은 고딕" charset="0"/>
                         <a:ea typeface="맑은 고딕" charset="0"/>
                         <a:cs typeface="맑은 고딕" charset="0"/>
@@ -5877,7 +7196,7 @@
                           <a:ea typeface="맑은 고딕" pitchFamily="34" charset="-122"/>
                           <a:cs typeface="맑은 고딕" pitchFamily="34" charset="-120"/>
                         </a:rPr>
-                        <a:t>한국글로벌자산운용…</a:t>
+                        <a:t>한국글로벌자산운용_12층_본사사업부</a:t>
                       </a:r>
                       <a:endParaRPr lang="en-US" sz="700" dirty="0">
                         <a:latin typeface="맑은 고딕" charset="0"/>
@@ -5937,7 +7256,7 @@
                         <a:buNone/>
                       </a:pPr>
                       <a:r>
-                        <a:rPr lang="en-US" sz="750" dirty="0">
+                        <a:rPr lang="en-US" sz="700" dirty="0">
                           <a:solidFill>
                             <a:srgbClr val="2B2B2B"/>
                           </a:solidFill>
@@ -5947,7 +7266,7 @@
                         </a:rPr>
                         <a:t>업무시설</a:t>
                       </a:r>
-                      <a:endParaRPr lang="en-US" sz="750" dirty="0">
+                      <a:endParaRPr lang="en-US" sz="700" dirty="0">
                         <a:latin typeface="맑은 고딕" charset="0"/>
                         <a:ea typeface="맑은 고딕" charset="0"/>
                         <a:cs typeface="맑은 고딕" charset="0"/>
@@ -6005,7 +7324,7 @@
                         <a:buNone/>
                       </a:pPr>
                       <a:r>
-                        <a:rPr lang="en-US" sz="750" dirty="0">
+                        <a:rPr lang="en-US" sz="700" dirty="0">
                           <a:solidFill>
                             <a:srgbClr val="2B2B2B"/>
                           </a:solidFill>
@@ -6015,7 +7334,7 @@
                         </a:rPr>
                         <a:t>1,250.5</a:t>
                       </a:r>
-                      <a:endParaRPr lang="en-US" sz="750" dirty="0">
+                      <a:endParaRPr lang="en-US" sz="700" dirty="0">
                         <a:latin typeface="맑은 고딕" charset="0"/>
                         <a:ea typeface="맑은 고딕" charset="0"/>
                         <a:cs typeface="맑은 고딕" charset="0"/>
@@ -6073,7 +7392,7 @@
                         <a:buNone/>
                       </a:pPr>
                       <a:r>
-                        <a:rPr lang="en-US" sz="750" dirty="0">
+                        <a:rPr lang="en-US" sz="700" dirty="0">
                           <a:solidFill>
                             <a:srgbClr val="2B2B2B"/>
                           </a:solidFill>
@@ -6083,7 +7402,7 @@
                         </a:rPr>
                         <a:t>750.3</a:t>
                       </a:r>
-                      <a:endParaRPr lang="en-US" sz="750" dirty="0">
+                      <a:endParaRPr lang="en-US" sz="700" dirty="0">
                         <a:latin typeface="맑은 고딕" charset="0"/>
                         <a:ea typeface="맑은 고딕" charset="0"/>
                         <a:cs typeface="맑은 고딕" charset="0"/>
@@ -6149,7 +7468,7 @@
                           <a:ea typeface="맑은 고딕" pitchFamily="34" charset="-122"/>
                           <a:cs typeface="맑은 고딕" pitchFamily="34" charset="-120"/>
                         </a:rPr>
-                        <a:t>150,000,000,…</a:t>
+                        <a:t>150,000,000,000</a:t>
                       </a:r>
                       <a:endParaRPr lang="en-US" sz="700" dirty="0">
                         <a:latin typeface="맑은 고딕" charset="0"/>
@@ -6277,7 +7596,7 @@
                         <a:buNone/>
                       </a:pPr>
                       <a:r>
-                        <a:rPr lang="en-US" sz="750" dirty="0">
+                        <a:rPr lang="en-US" sz="700" dirty="0">
                           <a:solidFill>
                             <a:srgbClr val="2B2B2B"/>
                           </a:solidFill>
@@ -6287,7 +7606,7 @@
                         </a:rPr>
                         <a:t>150,000,000</a:t>
                       </a:r>
-                      <a:endParaRPr lang="en-US" sz="750" dirty="0">
+                      <a:endParaRPr lang="en-US" sz="700" dirty="0">
                         <a:latin typeface="맑은 고딕" charset="0"/>
                         <a:ea typeface="맑은 고딕" charset="0"/>
                         <a:cs typeface="맑은 고딕" charset="0"/>
@@ -6413,7 +7732,7 @@
                         <a:buNone/>
                       </a:pPr>
                       <a:r>
-                        <a:rPr lang="en-US" sz="750" dirty="0">
+                        <a:rPr lang="en-US" sz="700" dirty="0">
                           <a:solidFill>
                             <a:srgbClr val="2B2B2B"/>
                           </a:solidFill>
@@ -6423,7 +7742,7 @@
                         </a:rPr>
                         <a:t>2028-12-31</a:t>
                       </a:r>
-                      <a:endParaRPr lang="en-US" sz="750" dirty="0">
+                      <a:endParaRPr lang="en-US" sz="700" dirty="0">
                         <a:latin typeface="맑은 고딕" charset="0"/>
                         <a:ea typeface="맑은 고딕" charset="0"/>
                         <a:cs typeface="맑은 고딕" charset="0"/>
@@ -6473,7 +7792,7 @@
                   </a:tcPr>
                 </a:tc>
               </a:tr>
-              <a:tr h="243840">
+              <a:tr h="221381">
                 <a:tc>
                   <a:txBody>
                     <a:bodyPr/>
@@ -6483,7 +7802,7 @@
                         <a:buNone/>
                       </a:pPr>
                       <a:r>
-                        <a:rPr lang="en-US" sz="750" dirty="0">
+                        <a:rPr lang="en-US" sz="700" dirty="0">
                           <a:solidFill>
                             <a:srgbClr val="2B2B2B"/>
                           </a:solidFill>
@@ -6493,7 +7812,7 @@
                         </a:rPr>
                         <a:t>11F</a:t>
                       </a:r>
-                      <a:endParaRPr lang="en-US" sz="750" dirty="0">
+                      <a:endParaRPr lang="en-US" sz="700" dirty="0">
                         <a:latin typeface="맑은 고딕" charset="0"/>
                         <a:ea typeface="맑은 고딕" charset="0"/>
                         <a:cs typeface="맑은 고딕" charset="0"/>
@@ -6559,7 +7878,7 @@
                           <a:ea typeface="맑은 고딕" pitchFamily="34" charset="-122"/>
                           <a:cs typeface="맑은 고딕" pitchFamily="34" charset="-120"/>
                         </a:rPr>
-                        <a:t>한국글로벌자산운용…</a:t>
+                        <a:t>한국글로벌자산운용_11층_본사사업부</a:t>
                       </a:r>
                       <a:endParaRPr lang="en-US" sz="700" dirty="0">
                         <a:latin typeface="맑은 고딕" charset="0"/>
@@ -6619,7 +7938,7 @@
                         <a:buNone/>
                       </a:pPr>
                       <a:r>
-                        <a:rPr lang="en-US" sz="750" dirty="0">
+                        <a:rPr lang="en-US" sz="700" dirty="0">
                           <a:solidFill>
                             <a:srgbClr val="2B2B2B"/>
                           </a:solidFill>
@@ -6629,7 +7948,7 @@
                         </a:rPr>
                         <a:t>업무시설</a:t>
                       </a:r>
-                      <a:endParaRPr lang="en-US" sz="750" dirty="0">
+                      <a:endParaRPr lang="en-US" sz="700" dirty="0">
                         <a:latin typeface="맑은 고딕" charset="0"/>
                         <a:ea typeface="맑은 고딕" charset="0"/>
                         <a:cs typeface="맑은 고딕" charset="0"/>
@@ -6687,7 +8006,7 @@
                         <a:buNone/>
                       </a:pPr>
                       <a:r>
-                        <a:rPr lang="en-US" sz="750" dirty="0">
+                        <a:rPr lang="en-US" sz="700" dirty="0">
                           <a:solidFill>
                             <a:srgbClr val="2B2B2B"/>
                           </a:solidFill>
@@ -6697,7 +8016,7 @@
                         </a:rPr>
                         <a:t>1,250.5</a:t>
                       </a:r>
-                      <a:endParaRPr lang="en-US" sz="750" dirty="0">
+                      <a:endParaRPr lang="en-US" sz="700" dirty="0">
                         <a:latin typeface="맑은 고딕" charset="0"/>
                         <a:ea typeface="맑은 고딕" charset="0"/>
                         <a:cs typeface="맑은 고딕" charset="0"/>
@@ -6755,7 +8074,7 @@
                         <a:buNone/>
                       </a:pPr>
                       <a:r>
-                        <a:rPr lang="en-US" sz="750" dirty="0">
+                        <a:rPr lang="en-US" sz="700" dirty="0">
                           <a:solidFill>
                             <a:srgbClr val="2B2B2B"/>
                           </a:solidFill>
@@ -6765,7 +8084,7 @@
                         </a:rPr>
                         <a:t>750.3</a:t>
                       </a:r>
-                      <a:endParaRPr lang="en-US" sz="750" dirty="0">
+                      <a:endParaRPr lang="en-US" sz="700" dirty="0">
                         <a:latin typeface="맑은 고딕" charset="0"/>
                         <a:ea typeface="맑은 고딕" charset="0"/>
                         <a:cs typeface="맑은 고딕" charset="0"/>
@@ -6831,7 +8150,7 @@
                           <a:ea typeface="맑은 고딕" pitchFamily="34" charset="-122"/>
                           <a:cs typeface="맑은 고딕" pitchFamily="34" charset="-120"/>
                         </a:rPr>
-                        <a:t>150,000,000,…</a:t>
+                        <a:t>150,000,000,000</a:t>
                       </a:r>
                       <a:endParaRPr lang="en-US" sz="700" dirty="0">
                         <a:latin typeface="맑은 고딕" charset="0"/>
@@ -6959,7 +8278,7 @@
                         <a:buNone/>
                       </a:pPr>
                       <a:r>
-                        <a:rPr lang="en-US" sz="750" dirty="0">
+                        <a:rPr lang="en-US" sz="700" dirty="0">
                           <a:solidFill>
                             <a:srgbClr val="2B2B2B"/>
                           </a:solidFill>
@@ -6969,7 +8288,7 @@
                         </a:rPr>
                         <a:t>150,000,000</a:t>
                       </a:r>
-                      <a:endParaRPr lang="en-US" sz="750" dirty="0">
+                      <a:endParaRPr lang="en-US" sz="700" dirty="0">
                         <a:latin typeface="맑은 고딕" charset="0"/>
                         <a:ea typeface="맑은 고딕" charset="0"/>
                         <a:cs typeface="맑은 고딕" charset="0"/>
@@ -7095,7 +8414,7 @@
                         <a:buNone/>
                       </a:pPr>
                       <a:r>
-                        <a:rPr lang="en-US" sz="750" dirty="0">
+                        <a:rPr lang="en-US" sz="700" dirty="0">
                           <a:solidFill>
                             <a:srgbClr val="2B2B2B"/>
                           </a:solidFill>
@@ -7105,7 +8424,7 @@
                         </a:rPr>
                         <a:t>2028-12-31</a:t>
                       </a:r>
-                      <a:endParaRPr lang="en-US" sz="750" dirty="0">
+                      <a:endParaRPr lang="en-US" sz="700" dirty="0">
                         <a:latin typeface="맑은 고딕" charset="0"/>
                         <a:ea typeface="맑은 고딕" charset="0"/>
                         <a:cs typeface="맑은 고딕" charset="0"/>
@@ -7155,7 +8474,7 @@
                   </a:tcPr>
                 </a:tc>
               </a:tr>
-              <a:tr h="243840">
+              <a:tr h="221381">
                 <a:tc>
                   <a:txBody>
                     <a:bodyPr/>
@@ -7165,7 +8484,7 @@
                         <a:buNone/>
                       </a:pPr>
                       <a:r>
-                        <a:rPr lang="en-US" sz="750" dirty="0">
+                        <a:rPr lang="en-US" sz="700" dirty="0">
                           <a:solidFill>
                             <a:srgbClr val="2B2B2B"/>
                           </a:solidFill>
@@ -7175,7 +8494,7 @@
                         </a:rPr>
                         <a:t>10F</a:t>
                       </a:r>
-                      <a:endParaRPr lang="en-US" sz="750" dirty="0">
+                      <a:endParaRPr lang="en-US" sz="700" dirty="0">
                         <a:latin typeface="맑은 고딕" charset="0"/>
                         <a:ea typeface="맑은 고딕" charset="0"/>
                         <a:cs typeface="맑은 고딕" charset="0"/>
@@ -7241,7 +8560,7 @@
                           <a:ea typeface="맑은 고딕" pitchFamily="34" charset="-122"/>
                           <a:cs typeface="맑은 고딕" pitchFamily="34" charset="-120"/>
                         </a:rPr>
-                        <a:t>한국글로벌자산운용…</a:t>
+                        <a:t>한국글로벌자산운용_10층_본사사업부</a:t>
                       </a:r>
                       <a:endParaRPr lang="en-US" sz="700" dirty="0">
                         <a:latin typeface="맑은 고딕" charset="0"/>
@@ -7301,7 +8620,7 @@
                         <a:buNone/>
                       </a:pPr>
                       <a:r>
-                        <a:rPr lang="en-US" sz="750" dirty="0">
+                        <a:rPr lang="en-US" sz="700" dirty="0">
                           <a:solidFill>
                             <a:srgbClr val="2B2B2B"/>
                           </a:solidFill>
@@ -7311,7 +8630,7 @@
                         </a:rPr>
                         <a:t>업무시설</a:t>
                       </a:r>
-                      <a:endParaRPr lang="en-US" sz="750" dirty="0">
+                      <a:endParaRPr lang="en-US" sz="700" dirty="0">
                         <a:latin typeface="맑은 고딕" charset="0"/>
                         <a:ea typeface="맑은 고딕" charset="0"/>
                         <a:cs typeface="맑은 고딕" charset="0"/>
@@ -7369,7 +8688,7 @@
                         <a:buNone/>
                       </a:pPr>
                       <a:r>
-                        <a:rPr lang="en-US" sz="750" dirty="0">
+                        <a:rPr lang="en-US" sz="700" dirty="0">
                           <a:solidFill>
                             <a:srgbClr val="2B2B2B"/>
                           </a:solidFill>
@@ -7379,7 +8698,7 @@
                         </a:rPr>
                         <a:t>1,250.5</a:t>
                       </a:r>
-                      <a:endParaRPr lang="en-US" sz="750" dirty="0">
+                      <a:endParaRPr lang="en-US" sz="700" dirty="0">
                         <a:latin typeface="맑은 고딕" charset="0"/>
                         <a:ea typeface="맑은 고딕" charset="0"/>
                         <a:cs typeface="맑은 고딕" charset="0"/>
@@ -7437,7 +8756,7 @@
                         <a:buNone/>
                       </a:pPr>
                       <a:r>
-                        <a:rPr lang="en-US" sz="750" dirty="0">
+                        <a:rPr lang="en-US" sz="700" dirty="0">
                           <a:solidFill>
                             <a:srgbClr val="2B2B2B"/>
                           </a:solidFill>
@@ -7447,7 +8766,7 @@
                         </a:rPr>
                         <a:t>750.3</a:t>
                       </a:r>
-                      <a:endParaRPr lang="en-US" sz="750" dirty="0">
+                      <a:endParaRPr lang="en-US" sz="700" dirty="0">
                         <a:latin typeface="맑은 고딕" charset="0"/>
                         <a:ea typeface="맑은 고딕" charset="0"/>
                         <a:cs typeface="맑은 고딕" charset="0"/>
@@ -7513,7 +8832,7 @@
                           <a:ea typeface="맑은 고딕" pitchFamily="34" charset="-122"/>
                           <a:cs typeface="맑은 고딕" pitchFamily="34" charset="-120"/>
                         </a:rPr>
-                        <a:t>150,000,000,…</a:t>
+                        <a:t>150,000,000,000</a:t>
                       </a:r>
                       <a:endParaRPr lang="en-US" sz="700" dirty="0">
                         <a:latin typeface="맑은 고딕" charset="0"/>
@@ -7641,7 +8960,7 @@
                         <a:buNone/>
                       </a:pPr>
                       <a:r>
-                        <a:rPr lang="en-US" sz="750" dirty="0">
+                        <a:rPr lang="en-US" sz="700" dirty="0">
                           <a:solidFill>
                             <a:srgbClr val="2B2B2B"/>
                           </a:solidFill>
@@ -7651,7 +8970,7 @@
                         </a:rPr>
                         <a:t>150,000,000</a:t>
                       </a:r>
-                      <a:endParaRPr lang="en-US" sz="750" dirty="0">
+                      <a:endParaRPr lang="en-US" sz="700" dirty="0">
                         <a:latin typeface="맑은 고딕" charset="0"/>
                         <a:ea typeface="맑은 고딕" charset="0"/>
                         <a:cs typeface="맑은 고딕" charset="0"/>
@@ -7777,7 +9096,7 @@
                         <a:buNone/>
                       </a:pPr>
                       <a:r>
-                        <a:rPr lang="en-US" sz="750" dirty="0">
+                        <a:rPr lang="en-US" sz="700" dirty="0">
                           <a:solidFill>
                             <a:srgbClr val="2B2B2B"/>
                           </a:solidFill>
@@ -7787,7 +9106,7 @@
                         </a:rPr>
                         <a:t>2028-12-31</a:t>
                       </a:r>
-                      <a:endParaRPr lang="en-US" sz="750" dirty="0">
+                      <a:endParaRPr lang="en-US" sz="700" dirty="0">
                         <a:latin typeface="맑은 고딕" charset="0"/>
                         <a:ea typeface="맑은 고딕" charset="0"/>
                         <a:cs typeface="맑은 고딕" charset="0"/>
@@ -7837,7 +9156,7 @@
                   </a:tcPr>
                 </a:tc>
               </a:tr>
-              <a:tr h="243840">
+              <a:tr h="221381">
                 <a:tc>
                   <a:txBody>
                     <a:bodyPr/>
@@ -7847,7 +9166,7 @@
                         <a:buNone/>
                       </a:pPr>
                       <a:r>
-                        <a:rPr lang="en-US" sz="750" dirty="0">
+                        <a:rPr lang="en-US" sz="700" dirty="0">
                           <a:solidFill>
                             <a:srgbClr val="2B2B2B"/>
                           </a:solidFill>
@@ -7857,7 +9176,7 @@
                         </a:rPr>
                         <a:t>9F</a:t>
                       </a:r>
-                      <a:endParaRPr lang="en-US" sz="750" dirty="0">
+                      <a:endParaRPr lang="en-US" sz="700" dirty="0">
                         <a:latin typeface="맑은 고딕" charset="0"/>
                         <a:ea typeface="맑은 고딕" charset="0"/>
                         <a:cs typeface="맑은 고딕" charset="0"/>
@@ -7923,7 +9242,7 @@
                           <a:ea typeface="맑은 고딕" pitchFamily="34" charset="-122"/>
                           <a:cs typeface="맑은 고딕" pitchFamily="34" charset="-120"/>
                         </a:rPr>
-                        <a:t>한국글로벌자산운용…</a:t>
+                        <a:t>한국글로벌자산운용_9층_본사사업부</a:t>
                       </a:r>
                       <a:endParaRPr lang="en-US" sz="700" dirty="0">
                         <a:latin typeface="맑은 고딕" charset="0"/>
@@ -7983,7 +9302,7 @@
                         <a:buNone/>
                       </a:pPr>
                       <a:r>
-                        <a:rPr lang="en-US" sz="750" dirty="0">
+                        <a:rPr lang="en-US" sz="700" dirty="0">
                           <a:solidFill>
                             <a:srgbClr val="2B2B2B"/>
                           </a:solidFill>
@@ -7993,7 +9312,7 @@
                         </a:rPr>
                         <a:t>업무시설</a:t>
                       </a:r>
-                      <a:endParaRPr lang="en-US" sz="750" dirty="0">
+                      <a:endParaRPr lang="en-US" sz="700" dirty="0">
                         <a:latin typeface="맑은 고딕" charset="0"/>
                         <a:ea typeface="맑은 고딕" charset="0"/>
                         <a:cs typeface="맑은 고딕" charset="0"/>
@@ -8051,7 +9370,7 @@
                         <a:buNone/>
                       </a:pPr>
                       <a:r>
-                        <a:rPr lang="en-US" sz="750" dirty="0">
+                        <a:rPr lang="en-US" sz="700" dirty="0">
                           <a:solidFill>
                             <a:srgbClr val="2B2B2B"/>
                           </a:solidFill>
@@ -8061,7 +9380,7 @@
                         </a:rPr>
                         <a:t>1,250.5</a:t>
                       </a:r>
-                      <a:endParaRPr lang="en-US" sz="750" dirty="0">
+                      <a:endParaRPr lang="en-US" sz="700" dirty="0">
                         <a:latin typeface="맑은 고딕" charset="0"/>
                         <a:ea typeface="맑은 고딕" charset="0"/>
                         <a:cs typeface="맑은 고딕" charset="0"/>
@@ -8119,7 +9438,7 @@
                         <a:buNone/>
                       </a:pPr>
                       <a:r>
-                        <a:rPr lang="en-US" sz="750" dirty="0">
+                        <a:rPr lang="en-US" sz="700" dirty="0">
                           <a:solidFill>
                             <a:srgbClr val="2B2B2B"/>
                           </a:solidFill>
@@ -8129,7 +9448,7 @@
                         </a:rPr>
                         <a:t>750.3</a:t>
                       </a:r>
-                      <a:endParaRPr lang="en-US" sz="750" dirty="0">
+                      <a:endParaRPr lang="en-US" sz="700" dirty="0">
                         <a:latin typeface="맑은 고딕" charset="0"/>
                         <a:ea typeface="맑은 고딕" charset="0"/>
                         <a:cs typeface="맑은 고딕" charset="0"/>
@@ -8195,7 +9514,7 @@
                           <a:ea typeface="맑은 고딕" pitchFamily="34" charset="-122"/>
                           <a:cs typeface="맑은 고딕" pitchFamily="34" charset="-120"/>
                         </a:rPr>
-                        <a:t>150,000,000,…</a:t>
+                        <a:t>150,000,000,000</a:t>
                       </a:r>
                       <a:endParaRPr lang="en-US" sz="700" dirty="0">
                         <a:latin typeface="맑은 고딕" charset="0"/>
@@ -8323,7 +9642,7 @@
                         <a:buNone/>
                       </a:pPr>
                       <a:r>
-                        <a:rPr lang="en-US" sz="750" dirty="0">
+                        <a:rPr lang="en-US" sz="700" dirty="0">
                           <a:solidFill>
                             <a:srgbClr val="2B2B2B"/>
                           </a:solidFill>
@@ -8333,7 +9652,7 @@
                         </a:rPr>
                         <a:t>150,000,000</a:t>
                       </a:r>
-                      <a:endParaRPr lang="en-US" sz="750" dirty="0">
+                      <a:endParaRPr lang="en-US" sz="700" dirty="0">
                         <a:latin typeface="맑은 고딕" charset="0"/>
                         <a:ea typeface="맑은 고딕" charset="0"/>
                         <a:cs typeface="맑은 고딕" charset="0"/>
@@ -8459,7 +9778,7 @@
                         <a:buNone/>
                       </a:pPr>
                       <a:r>
-                        <a:rPr lang="en-US" sz="750" dirty="0">
+                        <a:rPr lang="en-US" sz="700" dirty="0">
                           <a:solidFill>
                             <a:srgbClr val="2B2B2B"/>
                           </a:solidFill>
@@ -8469,7 +9788,7 @@
                         </a:rPr>
                         <a:t>2028-12-31</a:t>
                       </a:r>
-                      <a:endParaRPr lang="en-US" sz="750" dirty="0">
+                      <a:endParaRPr lang="en-US" sz="700" dirty="0">
                         <a:latin typeface="맑은 고딕" charset="0"/>
                         <a:ea typeface="맑은 고딕" charset="0"/>
                         <a:cs typeface="맑은 고딕" charset="0"/>
@@ -8519,7 +9838,7 @@
                   </a:tcPr>
                 </a:tc>
               </a:tr>
-              <a:tr h="243840">
+              <a:tr h="221381">
                 <a:tc>
                   <a:txBody>
                     <a:bodyPr/>
@@ -8529,7 +9848,7 @@
                         <a:buNone/>
                       </a:pPr>
                       <a:r>
-                        <a:rPr lang="en-US" sz="750" dirty="0">
+                        <a:rPr lang="en-US" sz="700" dirty="0">
                           <a:solidFill>
                             <a:srgbClr val="2B2B2B"/>
                           </a:solidFill>
@@ -8539,7 +9858,7 @@
                         </a:rPr>
                         <a:t>8F</a:t>
                       </a:r>
-                      <a:endParaRPr lang="en-US" sz="750" dirty="0">
+                      <a:endParaRPr lang="en-US" sz="700" dirty="0">
                         <a:latin typeface="맑은 고딕" charset="0"/>
                         <a:ea typeface="맑은 고딕" charset="0"/>
                         <a:cs typeface="맑은 고딕" charset="0"/>
@@ -8605,7 +9924,7 @@
                           <a:ea typeface="맑은 고딕" pitchFamily="34" charset="-122"/>
                           <a:cs typeface="맑은 고딕" pitchFamily="34" charset="-120"/>
                         </a:rPr>
-                        <a:t>한국글로벌자산운용…</a:t>
+                        <a:t>한국글로벌자산운용_8층_본사사업부</a:t>
                       </a:r>
                       <a:endParaRPr lang="en-US" sz="700" dirty="0">
                         <a:latin typeface="맑은 고딕" charset="0"/>
@@ -8665,7 +9984,7 @@
                         <a:buNone/>
                       </a:pPr>
                       <a:r>
-                        <a:rPr lang="en-US" sz="750" dirty="0">
+                        <a:rPr lang="en-US" sz="700" dirty="0">
                           <a:solidFill>
                             <a:srgbClr val="2B2B2B"/>
                           </a:solidFill>
@@ -8675,7 +9994,7 @@
                         </a:rPr>
                         <a:t>업무시설</a:t>
                       </a:r>
-                      <a:endParaRPr lang="en-US" sz="750" dirty="0">
+                      <a:endParaRPr lang="en-US" sz="700" dirty="0">
                         <a:latin typeface="맑은 고딕" charset="0"/>
                         <a:ea typeface="맑은 고딕" charset="0"/>
                         <a:cs typeface="맑은 고딕" charset="0"/>
@@ -8733,7 +10052,7 @@
                         <a:buNone/>
                       </a:pPr>
                       <a:r>
-                        <a:rPr lang="en-US" sz="750" dirty="0">
+                        <a:rPr lang="en-US" sz="700" dirty="0">
                           <a:solidFill>
                             <a:srgbClr val="2B2B2B"/>
                           </a:solidFill>
@@ -8743,7 +10062,7 @@
                         </a:rPr>
                         <a:t>1,250.5</a:t>
                       </a:r>
-                      <a:endParaRPr lang="en-US" sz="750" dirty="0">
+                      <a:endParaRPr lang="en-US" sz="700" dirty="0">
                         <a:latin typeface="맑은 고딕" charset="0"/>
                         <a:ea typeface="맑은 고딕" charset="0"/>
                         <a:cs typeface="맑은 고딕" charset="0"/>
@@ -8801,7 +10120,7 @@
                         <a:buNone/>
                       </a:pPr>
                       <a:r>
-                        <a:rPr lang="en-US" sz="750" dirty="0">
+                        <a:rPr lang="en-US" sz="700" dirty="0">
                           <a:solidFill>
                             <a:srgbClr val="2B2B2B"/>
                           </a:solidFill>
@@ -8811,7 +10130,7 @@
                         </a:rPr>
                         <a:t>750.3</a:t>
                       </a:r>
-                      <a:endParaRPr lang="en-US" sz="750" dirty="0">
+                      <a:endParaRPr lang="en-US" sz="700" dirty="0">
                         <a:latin typeface="맑은 고딕" charset="0"/>
                         <a:ea typeface="맑은 고딕" charset="0"/>
                         <a:cs typeface="맑은 고딕" charset="0"/>
@@ -8877,7 +10196,7 @@
                           <a:ea typeface="맑은 고딕" pitchFamily="34" charset="-122"/>
                           <a:cs typeface="맑은 고딕" pitchFamily="34" charset="-120"/>
                         </a:rPr>
-                        <a:t>150,000,000,…</a:t>
+                        <a:t>150,000,000,000</a:t>
                       </a:r>
                       <a:endParaRPr lang="en-US" sz="700" dirty="0">
                         <a:latin typeface="맑은 고딕" charset="0"/>
@@ -9005,7 +10324,7 @@
                         <a:buNone/>
                       </a:pPr>
                       <a:r>
-                        <a:rPr lang="en-US" sz="750" dirty="0">
+                        <a:rPr lang="en-US" sz="700" dirty="0">
                           <a:solidFill>
                             <a:srgbClr val="2B2B2B"/>
                           </a:solidFill>
@@ -9015,7 +10334,7 @@
                         </a:rPr>
                         <a:t>150,000,000</a:t>
                       </a:r>
-                      <a:endParaRPr lang="en-US" sz="750" dirty="0">
+                      <a:endParaRPr lang="en-US" sz="700" dirty="0">
                         <a:latin typeface="맑은 고딕" charset="0"/>
                         <a:ea typeface="맑은 고딕" charset="0"/>
                         <a:cs typeface="맑은 고딕" charset="0"/>
@@ -9141,7 +10460,7 @@
                         <a:buNone/>
                       </a:pPr>
                       <a:r>
-                        <a:rPr lang="en-US" sz="750" dirty="0">
+                        <a:rPr lang="en-US" sz="700" dirty="0">
                           <a:solidFill>
                             <a:srgbClr val="2B2B2B"/>
                           </a:solidFill>
@@ -9151,7 +10470,7 @@
                         </a:rPr>
                         <a:t>2028-12-31</a:t>
                       </a:r>
-                      <a:endParaRPr lang="en-US" sz="750" dirty="0">
+                      <a:endParaRPr lang="en-US" sz="700" dirty="0">
                         <a:latin typeface="맑은 고딕" charset="0"/>
                         <a:ea typeface="맑은 고딕" charset="0"/>
                         <a:cs typeface="맑은 고딕" charset="0"/>
@@ -9201,7 +10520,7 @@
                   </a:tcPr>
                 </a:tc>
               </a:tr>
-              <a:tr h="243840">
+              <a:tr h="221381">
                 <a:tc>
                   <a:txBody>
                     <a:bodyPr/>
@@ -9211,7 +10530,7 @@
                         <a:buNone/>
                       </a:pPr>
                       <a:r>
-                        <a:rPr lang="en-US" sz="750" dirty="0">
+                        <a:rPr lang="en-US" sz="700" dirty="0">
                           <a:solidFill>
                             <a:srgbClr val="2B2B2B"/>
                           </a:solidFill>
@@ -9221,7 +10540,7 @@
                         </a:rPr>
                         <a:t>7F</a:t>
                       </a:r>
-                      <a:endParaRPr lang="en-US" sz="750" dirty="0">
+                      <a:endParaRPr lang="en-US" sz="700" dirty="0">
                         <a:latin typeface="맑은 고딕" charset="0"/>
                         <a:ea typeface="맑은 고딕" charset="0"/>
                         <a:cs typeface="맑은 고딕" charset="0"/>
@@ -9287,7 +10606,7 @@
                           <a:ea typeface="맑은 고딕" pitchFamily="34" charset="-122"/>
                           <a:cs typeface="맑은 고딕" pitchFamily="34" charset="-120"/>
                         </a:rPr>
-                        <a:t>한국글로벌자산운용…</a:t>
+                        <a:t>한국글로벌자산운용_7층_본사사업부</a:t>
                       </a:r>
                       <a:endParaRPr lang="en-US" sz="700" dirty="0">
                         <a:latin typeface="맑은 고딕" charset="0"/>
@@ -9347,7 +10666,7 @@
                         <a:buNone/>
                       </a:pPr>
                       <a:r>
-                        <a:rPr lang="en-US" sz="750" dirty="0">
+                        <a:rPr lang="en-US" sz="700" dirty="0">
                           <a:solidFill>
                             <a:srgbClr val="2B2B2B"/>
                           </a:solidFill>
@@ -9357,7 +10676,7 @@
                         </a:rPr>
                         <a:t>업무시설</a:t>
                       </a:r>
-                      <a:endParaRPr lang="en-US" sz="750" dirty="0">
+                      <a:endParaRPr lang="en-US" sz="700" dirty="0">
                         <a:latin typeface="맑은 고딕" charset="0"/>
                         <a:ea typeface="맑은 고딕" charset="0"/>
                         <a:cs typeface="맑은 고딕" charset="0"/>
@@ -9415,7 +10734,7 @@
                         <a:buNone/>
                       </a:pPr>
                       <a:r>
-                        <a:rPr lang="en-US" sz="750" dirty="0">
+                        <a:rPr lang="en-US" sz="700" dirty="0">
                           <a:solidFill>
                             <a:srgbClr val="2B2B2B"/>
                           </a:solidFill>
@@ -9425,7 +10744,7 @@
                         </a:rPr>
                         <a:t>1,250.5</a:t>
                       </a:r>
-                      <a:endParaRPr lang="en-US" sz="750" dirty="0">
+                      <a:endParaRPr lang="en-US" sz="700" dirty="0">
                         <a:latin typeface="맑은 고딕" charset="0"/>
                         <a:ea typeface="맑은 고딕" charset="0"/>
                         <a:cs typeface="맑은 고딕" charset="0"/>
@@ -9483,7 +10802,7 @@
                         <a:buNone/>
                       </a:pPr>
                       <a:r>
-                        <a:rPr lang="en-US" sz="750" dirty="0">
+                        <a:rPr lang="en-US" sz="700" dirty="0">
                           <a:solidFill>
                             <a:srgbClr val="2B2B2B"/>
                           </a:solidFill>
@@ -9493,7 +10812,7 @@
                         </a:rPr>
                         <a:t>750.3</a:t>
                       </a:r>
-                      <a:endParaRPr lang="en-US" sz="750" dirty="0">
+                      <a:endParaRPr lang="en-US" sz="700" dirty="0">
                         <a:latin typeface="맑은 고딕" charset="0"/>
                         <a:ea typeface="맑은 고딕" charset="0"/>
                         <a:cs typeface="맑은 고딕" charset="0"/>
@@ -9559,7 +10878,7 @@
                           <a:ea typeface="맑은 고딕" pitchFamily="34" charset="-122"/>
                           <a:cs typeface="맑은 고딕" pitchFamily="34" charset="-120"/>
                         </a:rPr>
-                        <a:t>150,000,000,…</a:t>
+                        <a:t>150,000,000,000</a:t>
                       </a:r>
                       <a:endParaRPr lang="en-US" sz="700" dirty="0">
                         <a:latin typeface="맑은 고딕" charset="0"/>
@@ -9687,7 +11006,7 @@
                         <a:buNone/>
                       </a:pPr>
                       <a:r>
-                        <a:rPr lang="en-US" sz="750" dirty="0">
+                        <a:rPr lang="en-US" sz="700" dirty="0">
                           <a:solidFill>
                             <a:srgbClr val="2B2B2B"/>
                           </a:solidFill>
@@ -9697,7 +11016,7 @@
                         </a:rPr>
                         <a:t>150,000,000</a:t>
                       </a:r>
-                      <a:endParaRPr lang="en-US" sz="750" dirty="0">
+                      <a:endParaRPr lang="en-US" sz="700" dirty="0">
                         <a:latin typeface="맑은 고딕" charset="0"/>
                         <a:ea typeface="맑은 고딕" charset="0"/>
                         <a:cs typeface="맑은 고딕" charset="0"/>
@@ -9823,7 +11142,7 @@
                         <a:buNone/>
                       </a:pPr>
                       <a:r>
-                        <a:rPr lang="en-US" sz="750" dirty="0">
+                        <a:rPr lang="en-US" sz="700" dirty="0">
                           <a:solidFill>
                             <a:srgbClr val="2B2B2B"/>
                           </a:solidFill>
@@ -9833,7 +11152,7 @@
                         </a:rPr>
                         <a:t>2028-12-31</a:t>
                       </a:r>
-                      <a:endParaRPr lang="en-US" sz="750" dirty="0">
+                      <a:endParaRPr lang="en-US" sz="700" dirty="0">
                         <a:latin typeface="맑은 고딕" charset="0"/>
                         <a:ea typeface="맑은 고딕" charset="0"/>
                         <a:cs typeface="맑은 고딕" charset="0"/>
@@ -9883,7 +11202,7 @@
                   </a:tcPr>
                 </a:tc>
               </a:tr>
-              <a:tr h="243840">
+              <a:tr h="221381">
                 <a:tc>
                   <a:txBody>
                     <a:bodyPr/>
@@ -9893,7 +11212,7 @@
                         <a:buNone/>
                       </a:pPr>
                       <a:r>
-                        <a:rPr lang="en-US" sz="750" dirty="0">
+                        <a:rPr lang="en-US" sz="700" dirty="0">
                           <a:solidFill>
                             <a:srgbClr val="2B2B2B"/>
                           </a:solidFill>
@@ -9903,7 +11222,7 @@
                         </a:rPr>
                         <a:t>6F</a:t>
                       </a:r>
-                      <a:endParaRPr lang="en-US" sz="750" dirty="0">
+                      <a:endParaRPr lang="en-US" sz="700" dirty="0">
                         <a:latin typeface="맑은 고딕" charset="0"/>
                         <a:ea typeface="맑은 고딕" charset="0"/>
                         <a:cs typeface="맑은 고딕" charset="0"/>
@@ -9969,7 +11288,7 @@
                           <a:ea typeface="맑은 고딕" pitchFamily="34" charset="-122"/>
                           <a:cs typeface="맑은 고딕" pitchFamily="34" charset="-120"/>
                         </a:rPr>
-                        <a:t>한국글로벌자산운용…</a:t>
+                        <a:t>한국글로벌자산운용_6층_본사사업부</a:t>
                       </a:r>
                       <a:endParaRPr lang="en-US" sz="700" dirty="0">
                         <a:latin typeface="맑은 고딕" charset="0"/>
@@ -10029,7 +11348,7 @@
                         <a:buNone/>
                       </a:pPr>
                       <a:r>
-                        <a:rPr lang="en-US" sz="750" dirty="0">
+                        <a:rPr lang="en-US" sz="700" dirty="0">
                           <a:solidFill>
                             <a:srgbClr val="2B2B2B"/>
                           </a:solidFill>
@@ -10039,7 +11358,7 @@
                         </a:rPr>
                         <a:t>업무시설</a:t>
                       </a:r>
-                      <a:endParaRPr lang="en-US" sz="750" dirty="0">
+                      <a:endParaRPr lang="en-US" sz="700" dirty="0">
                         <a:latin typeface="맑은 고딕" charset="0"/>
                         <a:ea typeface="맑은 고딕" charset="0"/>
                         <a:cs typeface="맑은 고딕" charset="0"/>
@@ -10097,7 +11416,7 @@
                         <a:buNone/>
                       </a:pPr>
                       <a:r>
-                        <a:rPr lang="en-US" sz="750" dirty="0">
+                        <a:rPr lang="en-US" sz="700" dirty="0">
                           <a:solidFill>
                             <a:srgbClr val="2B2B2B"/>
                           </a:solidFill>
@@ -10107,7 +11426,7 @@
                         </a:rPr>
                         <a:t>1,250.5</a:t>
                       </a:r>
-                      <a:endParaRPr lang="en-US" sz="750" dirty="0">
+                      <a:endParaRPr lang="en-US" sz="700" dirty="0">
                         <a:latin typeface="맑은 고딕" charset="0"/>
                         <a:ea typeface="맑은 고딕" charset="0"/>
                         <a:cs typeface="맑은 고딕" charset="0"/>
@@ -10165,7 +11484,7 @@
                         <a:buNone/>
                       </a:pPr>
                       <a:r>
-                        <a:rPr lang="en-US" sz="750" dirty="0">
+                        <a:rPr lang="en-US" sz="700" dirty="0">
                           <a:solidFill>
                             <a:srgbClr val="2B2B2B"/>
                           </a:solidFill>
@@ -10175,7 +11494,7 @@
                         </a:rPr>
                         <a:t>750.3</a:t>
                       </a:r>
-                      <a:endParaRPr lang="en-US" sz="750" dirty="0">
+                      <a:endParaRPr lang="en-US" sz="700" dirty="0">
                         <a:latin typeface="맑은 고딕" charset="0"/>
                         <a:ea typeface="맑은 고딕" charset="0"/>
                         <a:cs typeface="맑은 고딕" charset="0"/>
@@ -10241,7 +11560,7 @@
                           <a:ea typeface="맑은 고딕" pitchFamily="34" charset="-122"/>
                           <a:cs typeface="맑은 고딕" pitchFamily="34" charset="-120"/>
                         </a:rPr>
-                        <a:t>150,000,000,…</a:t>
+                        <a:t>150,000,000,000</a:t>
                       </a:r>
                       <a:endParaRPr lang="en-US" sz="700" dirty="0">
                         <a:latin typeface="맑은 고딕" charset="0"/>
@@ -10369,7 +11688,7 @@
                         <a:buNone/>
                       </a:pPr>
                       <a:r>
-                        <a:rPr lang="en-US" sz="750" dirty="0">
+                        <a:rPr lang="en-US" sz="700" dirty="0">
                           <a:solidFill>
                             <a:srgbClr val="2B2B2B"/>
                           </a:solidFill>
@@ -10379,7 +11698,7 @@
                         </a:rPr>
                         <a:t>150,000,000</a:t>
                       </a:r>
-                      <a:endParaRPr lang="en-US" sz="750" dirty="0">
+                      <a:endParaRPr lang="en-US" sz="700" dirty="0">
                         <a:latin typeface="맑은 고딕" charset="0"/>
                         <a:ea typeface="맑은 고딕" charset="0"/>
                         <a:cs typeface="맑은 고딕" charset="0"/>
@@ -10505,7 +11824,7 @@
                         <a:buNone/>
                       </a:pPr>
                       <a:r>
-                        <a:rPr lang="en-US" sz="750" dirty="0">
+                        <a:rPr lang="en-US" sz="700" dirty="0">
                           <a:solidFill>
                             <a:srgbClr val="2B2B2B"/>
                           </a:solidFill>
@@ -10515,7 +11834,7 @@
                         </a:rPr>
                         <a:t>2028-12-31</a:t>
                       </a:r>
-                      <a:endParaRPr lang="en-US" sz="750" dirty="0">
+                      <a:endParaRPr lang="en-US" sz="700" dirty="0">
                         <a:latin typeface="맑은 고딕" charset="0"/>
                         <a:ea typeface="맑은 고딕" charset="0"/>
                         <a:cs typeface="맑은 고딕" charset="0"/>
@@ -10565,7 +11884,7 @@
                   </a:tcPr>
                 </a:tc>
               </a:tr>
-              <a:tr h="243840">
+              <a:tr h="221381">
                 <a:tc>
                   <a:txBody>
                     <a:bodyPr/>
@@ -10575,7 +11894,7 @@
                         <a:buNone/>
                       </a:pPr>
                       <a:r>
-                        <a:rPr lang="en-US" sz="750" dirty="0">
+                        <a:rPr lang="en-US" sz="700" dirty="0">
                           <a:solidFill>
                             <a:srgbClr val="2B2B2B"/>
                           </a:solidFill>
@@ -10585,7 +11904,7 @@
                         </a:rPr>
                         <a:t>5F</a:t>
                       </a:r>
-                      <a:endParaRPr lang="en-US" sz="750" dirty="0">
+                      <a:endParaRPr lang="en-US" sz="700" dirty="0">
                         <a:latin typeface="맑은 고딕" charset="0"/>
                         <a:ea typeface="맑은 고딕" charset="0"/>
                         <a:cs typeface="맑은 고딕" charset="0"/>
@@ -10651,7 +11970,7 @@
                           <a:ea typeface="맑은 고딕" pitchFamily="34" charset="-122"/>
                           <a:cs typeface="맑은 고딕" pitchFamily="34" charset="-120"/>
                         </a:rPr>
-                        <a:t>한국글로벌자산운용…</a:t>
+                        <a:t>한국글로벌자산운용_5층_본사사업부</a:t>
                       </a:r>
                       <a:endParaRPr lang="en-US" sz="700" dirty="0">
                         <a:latin typeface="맑은 고딕" charset="0"/>
@@ -10711,7 +12030,7 @@
                         <a:buNone/>
                       </a:pPr>
                       <a:r>
-                        <a:rPr lang="en-US" sz="750" dirty="0">
+                        <a:rPr lang="en-US" sz="700" dirty="0">
                           <a:solidFill>
                             <a:srgbClr val="2B2B2B"/>
                           </a:solidFill>
@@ -10721,7 +12040,7 @@
                         </a:rPr>
                         <a:t>업무시설</a:t>
                       </a:r>
-                      <a:endParaRPr lang="en-US" sz="750" dirty="0">
+                      <a:endParaRPr lang="en-US" sz="700" dirty="0">
                         <a:latin typeface="맑은 고딕" charset="0"/>
                         <a:ea typeface="맑은 고딕" charset="0"/>
                         <a:cs typeface="맑은 고딕" charset="0"/>
@@ -10779,7 +12098,7 @@
                         <a:buNone/>
                       </a:pPr>
                       <a:r>
-                        <a:rPr lang="en-US" sz="750" dirty="0">
+                        <a:rPr lang="en-US" sz="700" dirty="0">
                           <a:solidFill>
                             <a:srgbClr val="2B2B2B"/>
                           </a:solidFill>
@@ -10789,7 +12108,7 @@
                         </a:rPr>
                         <a:t>1,250.5</a:t>
                       </a:r>
-                      <a:endParaRPr lang="en-US" sz="750" dirty="0">
+                      <a:endParaRPr lang="en-US" sz="700" dirty="0">
                         <a:latin typeface="맑은 고딕" charset="0"/>
                         <a:ea typeface="맑은 고딕" charset="0"/>
                         <a:cs typeface="맑은 고딕" charset="0"/>
@@ -10847,7 +12166,7 @@
                         <a:buNone/>
                       </a:pPr>
                       <a:r>
-                        <a:rPr lang="en-US" sz="750" dirty="0">
+                        <a:rPr lang="en-US" sz="700" dirty="0">
                           <a:solidFill>
                             <a:srgbClr val="2B2B2B"/>
                           </a:solidFill>
@@ -10857,7 +12176,7 @@
                         </a:rPr>
                         <a:t>750.3</a:t>
                       </a:r>
-                      <a:endParaRPr lang="en-US" sz="750" dirty="0">
+                      <a:endParaRPr lang="en-US" sz="700" dirty="0">
                         <a:latin typeface="맑은 고딕" charset="0"/>
                         <a:ea typeface="맑은 고딕" charset="0"/>
                         <a:cs typeface="맑은 고딕" charset="0"/>
@@ -10923,7 +12242,7 @@
                           <a:ea typeface="맑은 고딕" pitchFamily="34" charset="-122"/>
                           <a:cs typeface="맑은 고딕" pitchFamily="34" charset="-120"/>
                         </a:rPr>
-                        <a:t>150,000,000,…</a:t>
+                        <a:t>150,000,000,000</a:t>
                       </a:r>
                       <a:endParaRPr lang="en-US" sz="700" dirty="0">
                         <a:latin typeface="맑은 고딕" charset="0"/>
@@ -11051,7 +12370,7 @@
                         <a:buNone/>
                       </a:pPr>
                       <a:r>
-                        <a:rPr lang="en-US" sz="750" dirty="0">
+                        <a:rPr lang="en-US" sz="700" dirty="0">
                           <a:solidFill>
                             <a:srgbClr val="2B2B2B"/>
                           </a:solidFill>
@@ -11061,7 +12380,7 @@
                         </a:rPr>
                         <a:t>150,000,000</a:t>
                       </a:r>
-                      <a:endParaRPr lang="en-US" sz="750" dirty="0">
+                      <a:endParaRPr lang="en-US" sz="700" dirty="0">
                         <a:latin typeface="맑은 고딕" charset="0"/>
                         <a:ea typeface="맑은 고딕" charset="0"/>
                         <a:cs typeface="맑은 고딕" charset="0"/>
@@ -11187,7 +12506,7 @@
                         <a:buNone/>
                       </a:pPr>
                       <a:r>
-                        <a:rPr lang="en-US" sz="750" dirty="0">
+                        <a:rPr lang="en-US" sz="700" dirty="0">
                           <a:solidFill>
                             <a:srgbClr val="2B2B2B"/>
                           </a:solidFill>
@@ -11197,7 +12516,7 @@
                         </a:rPr>
                         <a:t>2028-12-31</a:t>
                       </a:r>
-                      <a:endParaRPr lang="en-US" sz="750" dirty="0">
+                      <a:endParaRPr lang="en-US" sz="700" dirty="0">
                         <a:latin typeface="맑은 고딕" charset="0"/>
                         <a:ea typeface="맑은 고딕" charset="0"/>
                         <a:cs typeface="맑은 고딕" charset="0"/>
@@ -11247,7 +12566,7 @@
                   </a:tcPr>
                 </a:tc>
               </a:tr>
-              <a:tr h="243840">
+              <a:tr h="221381">
                 <a:tc>
                   <a:txBody>
                     <a:bodyPr/>
@@ -11257,7 +12576,7 @@
                         <a:buNone/>
                       </a:pPr>
                       <a:r>
-                        <a:rPr lang="en-US" sz="750" dirty="0">
+                        <a:rPr lang="en-US" sz="700" dirty="0">
                           <a:solidFill>
                             <a:srgbClr val="2B2B2B"/>
                           </a:solidFill>
@@ -11267,7 +12586,7 @@
                         </a:rPr>
                         <a:t>4F</a:t>
                       </a:r>
-                      <a:endParaRPr lang="en-US" sz="750" dirty="0">
+                      <a:endParaRPr lang="en-US" sz="700" dirty="0">
                         <a:latin typeface="맑은 고딕" charset="0"/>
                         <a:ea typeface="맑은 고딕" charset="0"/>
                         <a:cs typeface="맑은 고딕" charset="0"/>
@@ -11333,7 +12652,7 @@
                           <a:ea typeface="맑은 고딕" pitchFamily="34" charset="-122"/>
                           <a:cs typeface="맑은 고딕" pitchFamily="34" charset="-120"/>
                         </a:rPr>
-                        <a:t>한국글로벌자산운용…</a:t>
+                        <a:t>한국글로벌자산운용_4층_본사사업부</a:t>
                       </a:r>
                       <a:endParaRPr lang="en-US" sz="700" dirty="0">
                         <a:latin typeface="맑은 고딕" charset="0"/>
@@ -11393,7 +12712,7 @@
                         <a:buNone/>
                       </a:pPr>
                       <a:r>
-                        <a:rPr lang="en-US" sz="750" dirty="0">
+                        <a:rPr lang="en-US" sz="700" dirty="0">
                           <a:solidFill>
                             <a:srgbClr val="2B2B2B"/>
                           </a:solidFill>
@@ -11403,7 +12722,7 @@
                         </a:rPr>
                         <a:t>업무시설</a:t>
                       </a:r>
-                      <a:endParaRPr lang="en-US" sz="750" dirty="0">
+                      <a:endParaRPr lang="en-US" sz="700" dirty="0">
                         <a:latin typeface="맑은 고딕" charset="0"/>
                         <a:ea typeface="맑은 고딕" charset="0"/>
                         <a:cs typeface="맑은 고딕" charset="0"/>
@@ -11461,7 +12780,7 @@
                         <a:buNone/>
                       </a:pPr>
                       <a:r>
-                        <a:rPr lang="en-US" sz="750" dirty="0">
+                        <a:rPr lang="en-US" sz="700" dirty="0">
                           <a:solidFill>
                             <a:srgbClr val="2B2B2B"/>
                           </a:solidFill>
@@ -11471,7 +12790,7 @@
                         </a:rPr>
                         <a:t>1,250.5</a:t>
                       </a:r>
-                      <a:endParaRPr lang="en-US" sz="750" dirty="0">
+                      <a:endParaRPr lang="en-US" sz="700" dirty="0">
                         <a:latin typeface="맑은 고딕" charset="0"/>
                         <a:ea typeface="맑은 고딕" charset="0"/>
                         <a:cs typeface="맑은 고딕" charset="0"/>
@@ -11529,7 +12848,7 @@
                         <a:buNone/>
                       </a:pPr>
                       <a:r>
-                        <a:rPr lang="en-US" sz="750" dirty="0">
+                        <a:rPr lang="en-US" sz="700" dirty="0">
                           <a:solidFill>
                             <a:srgbClr val="2B2B2B"/>
                           </a:solidFill>
@@ -11539,7 +12858,7 @@
                         </a:rPr>
                         <a:t>750.3</a:t>
                       </a:r>
-                      <a:endParaRPr lang="en-US" sz="750" dirty="0">
+                      <a:endParaRPr lang="en-US" sz="700" dirty="0">
                         <a:latin typeface="맑은 고딕" charset="0"/>
                         <a:ea typeface="맑은 고딕" charset="0"/>
                         <a:cs typeface="맑은 고딕" charset="0"/>
@@ -11605,7 +12924,7 @@
                           <a:ea typeface="맑은 고딕" pitchFamily="34" charset="-122"/>
                           <a:cs typeface="맑은 고딕" pitchFamily="34" charset="-120"/>
                         </a:rPr>
-                        <a:t>150,000,000,…</a:t>
+                        <a:t>150,000,000,000</a:t>
                       </a:r>
                       <a:endParaRPr lang="en-US" sz="700" dirty="0">
                         <a:latin typeface="맑은 고딕" charset="0"/>
@@ -11733,7 +13052,7 @@
                         <a:buNone/>
                       </a:pPr>
                       <a:r>
-                        <a:rPr lang="en-US" sz="750" dirty="0">
+                        <a:rPr lang="en-US" sz="700" dirty="0">
                           <a:solidFill>
                             <a:srgbClr val="2B2B2B"/>
                           </a:solidFill>
@@ -11743,7 +13062,7 @@
                         </a:rPr>
                         <a:t>150,000,000</a:t>
                       </a:r>
-                      <a:endParaRPr lang="en-US" sz="750" dirty="0">
+                      <a:endParaRPr lang="en-US" sz="700" dirty="0">
                         <a:latin typeface="맑은 고딕" charset="0"/>
                         <a:ea typeface="맑은 고딕" charset="0"/>
                         <a:cs typeface="맑은 고딕" charset="0"/>
@@ -11869,7 +13188,7 @@
                         <a:buNone/>
                       </a:pPr>
                       <a:r>
-                        <a:rPr lang="en-US" sz="750" dirty="0">
+                        <a:rPr lang="en-US" sz="700" dirty="0">
                           <a:solidFill>
                             <a:srgbClr val="2B2B2B"/>
                           </a:solidFill>
@@ -11879,7 +13198,7 @@
                         </a:rPr>
                         <a:t>2028-12-31</a:t>
                       </a:r>
-                      <a:endParaRPr lang="en-US" sz="750" dirty="0">
+                      <a:endParaRPr lang="en-US" sz="700" dirty="0">
                         <a:latin typeface="맑은 고딕" charset="0"/>
                         <a:ea typeface="맑은 고딕" charset="0"/>
                         <a:cs typeface="맑은 고딕" charset="0"/>
@@ -11929,7 +13248,7 @@
                   </a:tcPr>
                 </a:tc>
               </a:tr>
-              <a:tr h="243840">
+              <a:tr h="221381">
                 <a:tc>
                   <a:txBody>
                     <a:bodyPr/>
@@ -11939,7 +13258,7 @@
                         <a:buNone/>
                       </a:pPr>
                       <a:r>
-                        <a:rPr lang="en-US" sz="750" dirty="0">
+                        <a:rPr lang="en-US" sz="700" dirty="0">
                           <a:solidFill>
                             <a:srgbClr val="2B2B2B"/>
                           </a:solidFill>
@@ -11949,7 +13268,7 @@
                         </a:rPr>
                         <a:t>3F</a:t>
                       </a:r>
-                      <a:endParaRPr lang="en-US" sz="750" dirty="0">
+                      <a:endParaRPr lang="en-US" sz="700" dirty="0">
                         <a:latin typeface="맑은 고딕" charset="0"/>
                         <a:ea typeface="맑은 고딕" charset="0"/>
                         <a:cs typeface="맑은 고딕" charset="0"/>
@@ -12015,7 +13334,7 @@
                           <a:ea typeface="맑은 고딕" pitchFamily="34" charset="-122"/>
                           <a:cs typeface="맑은 고딕" pitchFamily="34" charset="-120"/>
                         </a:rPr>
-                        <a:t>한국글로벌자산운용…</a:t>
+                        <a:t>한국글로벌자산운용_3층_본사사업부</a:t>
                       </a:r>
                       <a:endParaRPr lang="en-US" sz="700" dirty="0">
                         <a:latin typeface="맑은 고딕" charset="0"/>
@@ -12075,7 +13394,7 @@
                         <a:buNone/>
                       </a:pPr>
                       <a:r>
-                        <a:rPr lang="en-US" sz="750" dirty="0">
+                        <a:rPr lang="en-US" sz="700" dirty="0">
                           <a:solidFill>
                             <a:srgbClr val="2B2B2B"/>
                           </a:solidFill>
@@ -12085,7 +13404,7 @@
                         </a:rPr>
                         <a:t>근린생활</a:t>
                       </a:r>
-                      <a:endParaRPr lang="en-US" sz="750" dirty="0">
+                      <a:endParaRPr lang="en-US" sz="700" dirty="0">
                         <a:latin typeface="맑은 고딕" charset="0"/>
                         <a:ea typeface="맑은 고딕" charset="0"/>
                         <a:cs typeface="맑은 고딕" charset="0"/>
@@ -12143,7 +13462,7 @@
                         <a:buNone/>
                       </a:pPr>
                       <a:r>
-                        <a:rPr lang="en-US" sz="750" dirty="0">
+                        <a:rPr lang="en-US" sz="700" dirty="0">
                           <a:solidFill>
                             <a:srgbClr val="2B2B2B"/>
                           </a:solidFill>
@@ -12153,7 +13472,7 @@
                         </a:rPr>
                         <a:t>1,250.5</a:t>
                       </a:r>
-                      <a:endParaRPr lang="en-US" sz="750" dirty="0">
+                      <a:endParaRPr lang="en-US" sz="700" dirty="0">
                         <a:latin typeface="맑은 고딕" charset="0"/>
                         <a:ea typeface="맑은 고딕" charset="0"/>
                         <a:cs typeface="맑은 고딕" charset="0"/>
@@ -12211,7 +13530,7 @@
                         <a:buNone/>
                       </a:pPr>
                       <a:r>
-                        <a:rPr lang="en-US" sz="750" dirty="0">
+                        <a:rPr lang="en-US" sz="700" dirty="0">
                           <a:solidFill>
                             <a:srgbClr val="2B2B2B"/>
                           </a:solidFill>
@@ -12221,7 +13540,7 @@
                         </a:rPr>
                         <a:t>750.3</a:t>
                       </a:r>
-                      <a:endParaRPr lang="en-US" sz="750" dirty="0">
+                      <a:endParaRPr lang="en-US" sz="700" dirty="0">
                         <a:latin typeface="맑은 고딕" charset="0"/>
                         <a:ea typeface="맑은 고딕" charset="0"/>
                         <a:cs typeface="맑은 고딕" charset="0"/>
@@ -12287,7 +13606,7 @@
                           <a:ea typeface="맑은 고딕" pitchFamily="34" charset="-122"/>
                           <a:cs typeface="맑은 고딕" pitchFamily="34" charset="-120"/>
                         </a:rPr>
-                        <a:t>150,000,000,…</a:t>
+                        <a:t>150,000,000,000</a:t>
                       </a:r>
                       <a:endParaRPr lang="en-US" sz="700" dirty="0">
                         <a:latin typeface="맑은 고딕" charset="0"/>
@@ -12415,7 +13734,7 @@
                         <a:buNone/>
                       </a:pPr>
                       <a:r>
-                        <a:rPr lang="en-US" sz="750" dirty="0">
+                        <a:rPr lang="en-US" sz="700" dirty="0">
                           <a:solidFill>
                             <a:srgbClr val="2B2B2B"/>
                           </a:solidFill>
@@ -12425,7 +13744,7 @@
                         </a:rPr>
                         <a:t>150,000,000</a:t>
                       </a:r>
-                      <a:endParaRPr lang="en-US" sz="750" dirty="0">
+                      <a:endParaRPr lang="en-US" sz="700" dirty="0">
                         <a:latin typeface="맑은 고딕" charset="0"/>
                         <a:ea typeface="맑은 고딕" charset="0"/>
                         <a:cs typeface="맑은 고딕" charset="0"/>
@@ -12551,7 +13870,7 @@
                         <a:buNone/>
                       </a:pPr>
                       <a:r>
-                        <a:rPr lang="en-US" sz="750" dirty="0">
+                        <a:rPr lang="en-US" sz="700" dirty="0">
                           <a:solidFill>
                             <a:srgbClr val="2B2B2B"/>
                           </a:solidFill>
@@ -12561,7 +13880,7 @@
                         </a:rPr>
                         <a:t>2028-12-31</a:t>
                       </a:r>
-                      <a:endParaRPr lang="en-US" sz="750" dirty="0">
+                      <a:endParaRPr lang="en-US" sz="700" dirty="0">
                         <a:latin typeface="맑은 고딕" charset="0"/>
                         <a:ea typeface="맑은 고딕" charset="0"/>
                         <a:cs typeface="맑은 고딕" charset="0"/>
@@ -12611,7 +13930,7 @@
                   </a:tcPr>
                 </a:tc>
               </a:tr>
-              <a:tr h="243840">
+              <a:tr h="221381">
                 <a:tc>
                   <a:txBody>
                     <a:bodyPr/>
@@ -12621,7 +13940,7 @@
                         <a:buNone/>
                       </a:pPr>
                       <a:r>
-                        <a:rPr lang="en-US" sz="750" dirty="0">
+                        <a:rPr lang="en-US" sz="700" dirty="0">
                           <a:solidFill>
                             <a:srgbClr val="2B2B2B"/>
                           </a:solidFill>
@@ -12631,7 +13950,7 @@
                         </a:rPr>
                         <a:t>2F</a:t>
                       </a:r>
-                      <a:endParaRPr lang="en-US" sz="750" dirty="0">
+                      <a:endParaRPr lang="en-US" sz="700" dirty="0">
                         <a:latin typeface="맑은 고딕" charset="0"/>
                         <a:ea typeface="맑은 고딕" charset="0"/>
                         <a:cs typeface="맑은 고딕" charset="0"/>
@@ -12697,7 +14016,7 @@
                           <a:ea typeface="맑은 고딕" pitchFamily="34" charset="-122"/>
                           <a:cs typeface="맑은 고딕" pitchFamily="34" charset="-120"/>
                         </a:rPr>
-                        <a:t>한국글로벌자산운용…</a:t>
+                        <a:t>한국글로벌자산운용_2층_본사사업부</a:t>
                       </a:r>
                       <a:endParaRPr lang="en-US" sz="700" dirty="0">
                         <a:latin typeface="맑은 고딕" charset="0"/>
@@ -12757,7 +14076,7 @@
                         <a:buNone/>
                       </a:pPr>
                       <a:r>
-                        <a:rPr lang="en-US" sz="750" dirty="0">
+                        <a:rPr lang="en-US" sz="700" dirty="0">
                           <a:solidFill>
                             <a:srgbClr val="2B2B2B"/>
                           </a:solidFill>
@@ -12767,7 +14086,7 @@
                         </a:rPr>
                         <a:t>근린생활</a:t>
                       </a:r>
-                      <a:endParaRPr lang="en-US" sz="750" dirty="0">
+                      <a:endParaRPr lang="en-US" sz="700" dirty="0">
                         <a:latin typeface="맑은 고딕" charset="0"/>
                         <a:ea typeface="맑은 고딕" charset="0"/>
                         <a:cs typeface="맑은 고딕" charset="0"/>
@@ -12825,7 +14144,7 @@
                         <a:buNone/>
                       </a:pPr>
                       <a:r>
-                        <a:rPr lang="en-US" sz="750" dirty="0">
+                        <a:rPr lang="en-US" sz="700" dirty="0">
                           <a:solidFill>
                             <a:srgbClr val="2B2B2B"/>
                           </a:solidFill>
@@ -12835,7 +14154,7 @@
                         </a:rPr>
                         <a:t>1,250.5</a:t>
                       </a:r>
-                      <a:endParaRPr lang="en-US" sz="750" dirty="0">
+                      <a:endParaRPr lang="en-US" sz="700" dirty="0">
                         <a:latin typeface="맑은 고딕" charset="0"/>
                         <a:ea typeface="맑은 고딕" charset="0"/>
                         <a:cs typeface="맑은 고딕" charset="0"/>
@@ -12893,7 +14212,7 @@
                         <a:buNone/>
                       </a:pPr>
                       <a:r>
-                        <a:rPr lang="en-US" sz="750" dirty="0">
+                        <a:rPr lang="en-US" sz="700" dirty="0">
                           <a:solidFill>
                             <a:srgbClr val="2B2B2B"/>
                           </a:solidFill>
@@ -12903,7 +14222,7 @@
                         </a:rPr>
                         <a:t>750.3</a:t>
                       </a:r>
-                      <a:endParaRPr lang="en-US" sz="750" dirty="0">
+                      <a:endParaRPr lang="en-US" sz="700" dirty="0">
                         <a:latin typeface="맑은 고딕" charset="0"/>
                         <a:ea typeface="맑은 고딕" charset="0"/>
                         <a:cs typeface="맑은 고딕" charset="0"/>
@@ -12969,7 +14288,7 @@
                           <a:ea typeface="맑은 고딕" pitchFamily="34" charset="-122"/>
                           <a:cs typeface="맑은 고딕" pitchFamily="34" charset="-120"/>
                         </a:rPr>
-                        <a:t>150,000,000,…</a:t>
+                        <a:t>150,000,000,000</a:t>
                       </a:r>
                       <a:endParaRPr lang="en-US" sz="700" dirty="0">
                         <a:latin typeface="맑은 고딕" charset="0"/>
@@ -13097,7 +14416,7 @@
                         <a:buNone/>
                       </a:pPr>
                       <a:r>
-                        <a:rPr lang="en-US" sz="750" dirty="0">
+                        <a:rPr lang="en-US" sz="700" dirty="0">
                           <a:solidFill>
                             <a:srgbClr val="2B2B2B"/>
                           </a:solidFill>
@@ -13107,7 +14426,7 @@
                         </a:rPr>
                         <a:t>150,000,000</a:t>
                       </a:r>
-                      <a:endParaRPr lang="en-US" sz="750" dirty="0">
+                      <a:endParaRPr lang="en-US" sz="700" dirty="0">
                         <a:latin typeface="맑은 고딕" charset="0"/>
                         <a:ea typeface="맑은 고딕" charset="0"/>
                         <a:cs typeface="맑은 고딕" charset="0"/>
@@ -13233,7 +14552,7 @@
                         <a:buNone/>
                       </a:pPr>
                       <a:r>
-                        <a:rPr lang="en-US" sz="750" dirty="0">
+                        <a:rPr lang="en-US" sz="700" dirty="0">
                           <a:solidFill>
                             <a:srgbClr val="2B2B2B"/>
                           </a:solidFill>
@@ -13243,7 +14562,7 @@
                         </a:rPr>
                         <a:t>2028-12-31</a:t>
                       </a:r>
-                      <a:endParaRPr lang="en-US" sz="750" dirty="0">
+                      <a:endParaRPr lang="en-US" sz="700" dirty="0">
                         <a:latin typeface="맑은 고딕" charset="0"/>
                         <a:ea typeface="맑은 고딕" charset="0"/>
                         <a:cs typeface="맑은 고딕" charset="0"/>
@@ -13289,6 +14608,688 @@
                     </a:lnB>
                     <a:solidFill>
                       <a:srgbClr val="FFFFFF"/>
+                    </a:solidFill>
+                  </a:tcPr>
+                </a:tc>
+              </a:tr>
+              <a:tr h="221381">
+                <a:tc>
+                  <a:txBody>
+                    <a:bodyPr/>
+                    <a:lstStyle/>
+                    <a:p>
+                      <a:pPr algn="ctr" indent="0" marL="0">
+                        <a:buNone/>
+                      </a:pPr>
+                      <a:r>
+                        <a:rPr lang="en-US" sz="700" b="1" dirty="0">
+                          <a:solidFill>
+                            <a:srgbClr val="10161F"/>
+                          </a:solidFill>
+                          <a:latin typeface="맑은 고딕" pitchFamily="34" charset="0"/>
+                          <a:ea typeface="맑은 고딕" pitchFamily="34" charset="-122"/>
+                          <a:cs typeface="맑은 고딕" pitchFamily="34" charset="-120"/>
+                        </a:rPr>
+                        <a:t>합계</a:t>
+                      </a:r>
+                      <a:endParaRPr lang="en-US" sz="700" dirty="0">
+                        <a:latin typeface="맑은 고딕" charset="0"/>
+                        <a:ea typeface="맑은 고딕" charset="0"/>
+                        <a:cs typeface="맑은 고딕" charset="0"/>
+                      </a:endParaRPr>
+                    </a:p>
+                  </a:txBody>
+                  <a:tcPr marL="50800" marR="50800" marT="25400" marB="25400" anchor="ctr">
+                    <a:lnL w="3810" cap="flat" cmpd="sng" algn="ctr">
+                      <a:solidFill>
+                        <a:srgbClr val="DDE3E8"/>
+                      </a:solidFill>
+                      <a:prstDash val="solid"/>
+                      <a:round/>
+                      <a:headEnd type="none" w="med" len="med"/>
+                      <a:tailEnd type="none" w="med" len="med"/>
+                    </a:lnL>
+                    <a:lnR w="3810" cap="flat" cmpd="sng" algn="ctr">
+                      <a:solidFill>
+                        <a:srgbClr val="DDE3E8"/>
+                      </a:solidFill>
+                      <a:prstDash val="solid"/>
+                      <a:round/>
+                      <a:headEnd type="none" w="med" len="med"/>
+                      <a:tailEnd type="none" w="med" len="med"/>
+                    </a:lnR>
+                    <a:lnT w="3810" cap="flat" cmpd="sng" algn="ctr">
+                      <a:solidFill>
+                        <a:srgbClr val="DDE3E8"/>
+                      </a:solidFill>
+                      <a:prstDash val="solid"/>
+                      <a:round/>
+                      <a:headEnd type="none" w="med" len="med"/>
+                      <a:tailEnd type="none" w="med" len="med"/>
+                    </a:lnT>
+                    <a:lnB w="3810" cap="flat" cmpd="sng" algn="ctr">
+                      <a:solidFill>
+                        <a:srgbClr val="DDE3E8"/>
+                      </a:solidFill>
+                      <a:prstDash val="solid"/>
+                      <a:round/>
+                      <a:headEnd type="none" w="med" len="med"/>
+                      <a:tailEnd type="none" w="med" len="med"/>
+                    </a:lnB>
+                    <a:solidFill>
+                      <a:srgbClr val="F5F7F9"/>
+                    </a:solidFill>
+                  </a:tcPr>
+                </a:tc>
+                <a:tc>
+                  <a:txBody>
+                    <a:bodyPr/>
+                    <a:lstStyle/>
+                    <a:p>
+                      <a:pPr algn="l" indent="0" marL="0">
+                        <a:buNone/>
+                      </a:pPr>
+                      <a:r>
+                        <a:rPr lang="en-US" sz="700" b="1" dirty="0">
+                          <a:solidFill>
+                            <a:srgbClr val="10161F"/>
+                          </a:solidFill>
+                          <a:latin typeface="맑은 고딕" pitchFamily="34" charset="0"/>
+                          <a:ea typeface="맑은 고딕" pitchFamily="34" charset="-122"/>
+                          <a:cs typeface="맑은 고딕" pitchFamily="34" charset="-120"/>
+                        </a:rPr>
+                        <a:t>18개 호실</a:t>
+                      </a:r>
+                      <a:endParaRPr lang="en-US" sz="700" dirty="0">
+                        <a:latin typeface="맑은 고딕" charset="0"/>
+                        <a:ea typeface="맑은 고딕" charset="0"/>
+                        <a:cs typeface="맑은 고딕" charset="0"/>
+                      </a:endParaRPr>
+                    </a:p>
+                  </a:txBody>
+                  <a:tcPr marL="50800" marR="50800" marT="25400" marB="25400" anchor="ctr">
+                    <a:lnL w="3810" cap="flat" cmpd="sng" algn="ctr">
+                      <a:solidFill>
+                        <a:srgbClr val="DDE3E8"/>
+                      </a:solidFill>
+                      <a:prstDash val="solid"/>
+                      <a:round/>
+                      <a:headEnd type="none" w="med" len="med"/>
+                      <a:tailEnd type="none" w="med" len="med"/>
+                    </a:lnL>
+                    <a:lnR w="3810" cap="flat" cmpd="sng" algn="ctr">
+                      <a:solidFill>
+                        <a:srgbClr val="DDE3E8"/>
+                      </a:solidFill>
+                      <a:prstDash val="solid"/>
+                      <a:round/>
+                      <a:headEnd type="none" w="med" len="med"/>
+                      <a:tailEnd type="none" w="med" len="med"/>
+                    </a:lnR>
+                    <a:lnT w="3810" cap="flat" cmpd="sng" algn="ctr">
+                      <a:solidFill>
+                        <a:srgbClr val="DDE3E8"/>
+                      </a:solidFill>
+                      <a:prstDash val="solid"/>
+                      <a:round/>
+                      <a:headEnd type="none" w="med" len="med"/>
+                      <a:tailEnd type="none" w="med" len="med"/>
+                    </a:lnT>
+                    <a:lnB w="3810" cap="flat" cmpd="sng" algn="ctr">
+                      <a:solidFill>
+                        <a:srgbClr val="DDE3E8"/>
+                      </a:solidFill>
+                      <a:prstDash val="solid"/>
+                      <a:round/>
+                      <a:headEnd type="none" w="med" len="med"/>
+                      <a:tailEnd type="none" w="med" len="med"/>
+                    </a:lnB>
+                    <a:solidFill>
+                      <a:srgbClr val="F5F7F9"/>
+                    </a:solidFill>
+                  </a:tcPr>
+                </a:tc>
+                <a:tc>
+                  <a:txBody>
+                    <a:bodyPr/>
+                    <a:lstStyle/>
+                    <a:p>
+                      <a:pPr algn="ctr" indent="0" marL="0">
+                        <a:buNone/>
+                      </a:pPr>
+                      <a:r>
+                        <a:rPr lang="en-US" sz="700" b="1" dirty="0">
+                          <a:solidFill>
+                            <a:srgbClr val="10161F"/>
+                          </a:solidFill>
+                          <a:latin typeface="맑은 고딕" pitchFamily="34" charset="0"/>
+                          <a:ea typeface="맑은 고딕" pitchFamily="34" charset="-122"/>
+                          <a:cs typeface="맑은 고딕" pitchFamily="34" charset="-120"/>
+                        </a:rPr>
+                        <a:t>-</a:t>
+                      </a:r>
+                      <a:endParaRPr lang="en-US" sz="700" dirty="0">
+                        <a:latin typeface="맑은 고딕" charset="0"/>
+                        <a:ea typeface="맑은 고딕" charset="0"/>
+                        <a:cs typeface="맑은 고딕" charset="0"/>
+                      </a:endParaRPr>
+                    </a:p>
+                  </a:txBody>
+                  <a:tcPr marL="50800" marR="50800" marT="25400" marB="25400" anchor="ctr">
+                    <a:lnL w="3810" cap="flat" cmpd="sng" algn="ctr">
+                      <a:solidFill>
+                        <a:srgbClr val="DDE3E8"/>
+                      </a:solidFill>
+                      <a:prstDash val="solid"/>
+                      <a:round/>
+                      <a:headEnd type="none" w="med" len="med"/>
+                      <a:tailEnd type="none" w="med" len="med"/>
+                    </a:lnL>
+                    <a:lnR w="3810" cap="flat" cmpd="sng" algn="ctr">
+                      <a:solidFill>
+                        <a:srgbClr val="DDE3E8"/>
+                      </a:solidFill>
+                      <a:prstDash val="solid"/>
+                      <a:round/>
+                      <a:headEnd type="none" w="med" len="med"/>
+                      <a:tailEnd type="none" w="med" len="med"/>
+                    </a:lnR>
+                    <a:lnT w="3810" cap="flat" cmpd="sng" algn="ctr">
+                      <a:solidFill>
+                        <a:srgbClr val="DDE3E8"/>
+                      </a:solidFill>
+                      <a:prstDash val="solid"/>
+                      <a:round/>
+                      <a:headEnd type="none" w="med" len="med"/>
+                      <a:tailEnd type="none" w="med" len="med"/>
+                    </a:lnT>
+                    <a:lnB w="3810" cap="flat" cmpd="sng" algn="ctr">
+                      <a:solidFill>
+                        <a:srgbClr val="DDE3E8"/>
+                      </a:solidFill>
+                      <a:prstDash val="solid"/>
+                      <a:round/>
+                      <a:headEnd type="none" w="med" len="med"/>
+                      <a:tailEnd type="none" w="med" len="med"/>
+                    </a:lnB>
+                    <a:solidFill>
+                      <a:srgbClr val="F5F7F9"/>
+                    </a:solidFill>
+                  </a:tcPr>
+                </a:tc>
+                <a:tc>
+                  <a:txBody>
+                    <a:bodyPr/>
+                    <a:lstStyle/>
+                    <a:p>
+                      <a:pPr algn="r" indent="0" marL="0">
+                        <a:buNone/>
+                      </a:pPr>
+                      <a:r>
+                        <a:rPr lang="en-US" sz="700" b="1" dirty="0">
+                          <a:solidFill>
+                            <a:srgbClr val="10161F"/>
+                          </a:solidFill>
+                          <a:latin typeface="맑은 고딕" pitchFamily="34" charset="0"/>
+                          <a:ea typeface="맑은 고딕" pitchFamily="34" charset="-122"/>
+                          <a:cs typeface="맑은 고딕" pitchFamily="34" charset="-120"/>
+                        </a:rPr>
+                        <a:t>22,509.0</a:t>
+                      </a:r>
+                      <a:endParaRPr lang="en-US" sz="700" dirty="0">
+                        <a:latin typeface="맑은 고딕" charset="0"/>
+                        <a:ea typeface="맑은 고딕" charset="0"/>
+                        <a:cs typeface="맑은 고딕" charset="0"/>
+                      </a:endParaRPr>
+                    </a:p>
+                  </a:txBody>
+                  <a:tcPr marL="50800" marR="50800" marT="25400" marB="25400" anchor="ctr">
+                    <a:lnL w="3810" cap="flat" cmpd="sng" algn="ctr">
+                      <a:solidFill>
+                        <a:srgbClr val="DDE3E8"/>
+                      </a:solidFill>
+                      <a:prstDash val="solid"/>
+                      <a:round/>
+                      <a:headEnd type="none" w="med" len="med"/>
+                      <a:tailEnd type="none" w="med" len="med"/>
+                    </a:lnL>
+                    <a:lnR w="3810" cap="flat" cmpd="sng" algn="ctr">
+                      <a:solidFill>
+                        <a:srgbClr val="DDE3E8"/>
+                      </a:solidFill>
+                      <a:prstDash val="solid"/>
+                      <a:round/>
+                      <a:headEnd type="none" w="med" len="med"/>
+                      <a:tailEnd type="none" w="med" len="med"/>
+                    </a:lnR>
+                    <a:lnT w="3810" cap="flat" cmpd="sng" algn="ctr">
+                      <a:solidFill>
+                        <a:srgbClr val="DDE3E8"/>
+                      </a:solidFill>
+                      <a:prstDash val="solid"/>
+                      <a:round/>
+                      <a:headEnd type="none" w="med" len="med"/>
+                      <a:tailEnd type="none" w="med" len="med"/>
+                    </a:lnT>
+                    <a:lnB w="3810" cap="flat" cmpd="sng" algn="ctr">
+                      <a:solidFill>
+                        <a:srgbClr val="DDE3E8"/>
+                      </a:solidFill>
+                      <a:prstDash val="solid"/>
+                      <a:round/>
+                      <a:headEnd type="none" w="med" len="med"/>
+                      <a:tailEnd type="none" w="med" len="med"/>
+                    </a:lnB>
+                    <a:solidFill>
+                      <a:srgbClr val="F5F7F9"/>
+                    </a:solidFill>
+                  </a:tcPr>
+                </a:tc>
+                <a:tc>
+                  <a:txBody>
+                    <a:bodyPr/>
+                    <a:lstStyle/>
+                    <a:p>
+                      <a:pPr algn="r" indent="0" marL="0">
+                        <a:buNone/>
+                      </a:pPr>
+                      <a:r>
+                        <a:rPr lang="en-US" sz="700" b="1" dirty="0">
+                          <a:solidFill>
+                            <a:srgbClr val="10161F"/>
+                          </a:solidFill>
+                          <a:latin typeface="맑은 고딕" pitchFamily="34" charset="0"/>
+                          <a:ea typeface="맑은 고딕" pitchFamily="34" charset="-122"/>
+                          <a:cs typeface="맑은 고딕" pitchFamily="34" charset="-120"/>
+                        </a:rPr>
+                        <a:t>13,505.4</a:t>
+                      </a:r>
+                      <a:endParaRPr lang="en-US" sz="700" dirty="0">
+                        <a:latin typeface="맑은 고딕" charset="0"/>
+                        <a:ea typeface="맑은 고딕" charset="0"/>
+                        <a:cs typeface="맑은 고딕" charset="0"/>
+                      </a:endParaRPr>
+                    </a:p>
+                  </a:txBody>
+                  <a:tcPr marL="50800" marR="50800" marT="25400" marB="25400" anchor="ctr">
+                    <a:lnL w="3810" cap="flat" cmpd="sng" algn="ctr">
+                      <a:solidFill>
+                        <a:srgbClr val="DDE3E8"/>
+                      </a:solidFill>
+                      <a:prstDash val="solid"/>
+                      <a:round/>
+                      <a:headEnd type="none" w="med" len="med"/>
+                      <a:tailEnd type="none" w="med" len="med"/>
+                    </a:lnL>
+                    <a:lnR w="3810" cap="flat" cmpd="sng" algn="ctr">
+                      <a:solidFill>
+                        <a:srgbClr val="DDE3E8"/>
+                      </a:solidFill>
+                      <a:prstDash val="solid"/>
+                      <a:round/>
+                      <a:headEnd type="none" w="med" len="med"/>
+                      <a:tailEnd type="none" w="med" len="med"/>
+                    </a:lnR>
+                    <a:lnT w="3810" cap="flat" cmpd="sng" algn="ctr">
+                      <a:solidFill>
+                        <a:srgbClr val="DDE3E8"/>
+                      </a:solidFill>
+                      <a:prstDash val="solid"/>
+                      <a:round/>
+                      <a:headEnd type="none" w="med" len="med"/>
+                      <a:tailEnd type="none" w="med" len="med"/>
+                    </a:lnT>
+                    <a:lnB w="3810" cap="flat" cmpd="sng" algn="ctr">
+                      <a:solidFill>
+                        <a:srgbClr val="DDE3E8"/>
+                      </a:solidFill>
+                      <a:prstDash val="solid"/>
+                      <a:round/>
+                      <a:headEnd type="none" w="med" len="med"/>
+                      <a:tailEnd type="none" w="med" len="med"/>
+                    </a:lnB>
+                    <a:solidFill>
+                      <a:srgbClr val="F5F7F9"/>
+                    </a:solidFill>
+                  </a:tcPr>
+                </a:tc>
+                <a:tc>
+                  <a:txBody>
+                    <a:bodyPr/>
+                    <a:lstStyle/>
+                    <a:p>
+                      <a:pPr algn="r" indent="0" marL="0">
+                        <a:buNone/>
+                      </a:pPr>
+                      <a:r>
+                        <a:rPr lang="en-US" sz="700" b="1" dirty="0">
+                          <a:solidFill>
+                            <a:srgbClr val="10161F"/>
+                          </a:solidFill>
+                          <a:latin typeface="맑은 고딕" pitchFamily="34" charset="0"/>
+                          <a:ea typeface="맑은 고딕" pitchFamily="34" charset="-122"/>
+                          <a:cs typeface="맑은 고딕" pitchFamily="34" charset="-120"/>
+                        </a:rPr>
+                        <a:t>2,700,000,000,000</a:t>
+                      </a:r>
+                      <a:endParaRPr lang="en-US" sz="700" dirty="0">
+                        <a:latin typeface="맑은 고딕" charset="0"/>
+                        <a:ea typeface="맑은 고딕" charset="0"/>
+                        <a:cs typeface="맑은 고딕" charset="0"/>
+                      </a:endParaRPr>
+                    </a:p>
+                  </a:txBody>
+                  <a:tcPr marL="50800" marR="50800" marT="25400" marB="25400" anchor="ctr">
+                    <a:lnL w="3810" cap="flat" cmpd="sng" algn="ctr">
+                      <a:solidFill>
+                        <a:srgbClr val="DDE3E8"/>
+                      </a:solidFill>
+                      <a:prstDash val="solid"/>
+                      <a:round/>
+                      <a:headEnd type="none" w="med" len="med"/>
+                      <a:tailEnd type="none" w="med" len="med"/>
+                    </a:lnL>
+                    <a:lnR w="3810" cap="flat" cmpd="sng" algn="ctr">
+                      <a:solidFill>
+                        <a:srgbClr val="DDE3E8"/>
+                      </a:solidFill>
+                      <a:prstDash val="solid"/>
+                      <a:round/>
+                      <a:headEnd type="none" w="med" len="med"/>
+                      <a:tailEnd type="none" w="med" len="med"/>
+                    </a:lnR>
+                    <a:lnT w="3810" cap="flat" cmpd="sng" algn="ctr">
+                      <a:solidFill>
+                        <a:srgbClr val="DDE3E8"/>
+                      </a:solidFill>
+                      <a:prstDash val="solid"/>
+                      <a:round/>
+                      <a:headEnd type="none" w="med" len="med"/>
+                      <a:tailEnd type="none" w="med" len="med"/>
+                    </a:lnT>
+                    <a:lnB w="3810" cap="flat" cmpd="sng" algn="ctr">
+                      <a:solidFill>
+                        <a:srgbClr val="DDE3E8"/>
+                      </a:solidFill>
+                      <a:prstDash val="solid"/>
+                      <a:round/>
+                      <a:headEnd type="none" w="med" len="med"/>
+                      <a:tailEnd type="none" w="med" len="med"/>
+                    </a:lnB>
+                    <a:solidFill>
+                      <a:srgbClr val="F5F7F9"/>
+                    </a:solidFill>
+                  </a:tcPr>
+                </a:tc>
+                <a:tc>
+                  <a:txBody>
+                    <a:bodyPr/>
+                    <a:lstStyle/>
+                    <a:p>
+                      <a:pPr algn="r" indent="0" marL="0">
+                        <a:buNone/>
+                      </a:pPr>
+                      <a:r>
+                        <a:rPr lang="en-US" sz="700" b="1" dirty="0">
+                          <a:solidFill>
+                            <a:srgbClr val="10161F"/>
+                          </a:solidFill>
+                          <a:latin typeface="맑은 고딕" pitchFamily="34" charset="0"/>
+                          <a:ea typeface="맑은 고딕" pitchFamily="34" charset="-122"/>
+                          <a:cs typeface="맑은 고딕" pitchFamily="34" charset="-120"/>
+                        </a:rPr>
+                        <a:t>22,500,000,000</a:t>
+                      </a:r>
+                      <a:endParaRPr lang="en-US" sz="700" dirty="0">
+                        <a:latin typeface="맑은 고딕" charset="0"/>
+                        <a:ea typeface="맑은 고딕" charset="0"/>
+                        <a:cs typeface="맑은 고딕" charset="0"/>
+                      </a:endParaRPr>
+                    </a:p>
+                  </a:txBody>
+                  <a:tcPr marL="50800" marR="50800" marT="25400" marB="25400" anchor="ctr">
+                    <a:lnL w="3810" cap="flat" cmpd="sng" algn="ctr">
+                      <a:solidFill>
+                        <a:srgbClr val="DDE3E8"/>
+                      </a:solidFill>
+                      <a:prstDash val="solid"/>
+                      <a:round/>
+                      <a:headEnd type="none" w="med" len="med"/>
+                      <a:tailEnd type="none" w="med" len="med"/>
+                    </a:lnL>
+                    <a:lnR w="3810" cap="flat" cmpd="sng" algn="ctr">
+                      <a:solidFill>
+                        <a:srgbClr val="DDE3E8"/>
+                      </a:solidFill>
+                      <a:prstDash val="solid"/>
+                      <a:round/>
+                      <a:headEnd type="none" w="med" len="med"/>
+                      <a:tailEnd type="none" w="med" len="med"/>
+                    </a:lnR>
+                    <a:lnT w="3810" cap="flat" cmpd="sng" algn="ctr">
+                      <a:solidFill>
+                        <a:srgbClr val="DDE3E8"/>
+                      </a:solidFill>
+                      <a:prstDash val="solid"/>
+                      <a:round/>
+                      <a:headEnd type="none" w="med" len="med"/>
+                      <a:tailEnd type="none" w="med" len="med"/>
+                    </a:lnT>
+                    <a:lnB w="3810" cap="flat" cmpd="sng" algn="ctr">
+                      <a:solidFill>
+                        <a:srgbClr val="DDE3E8"/>
+                      </a:solidFill>
+                      <a:prstDash val="solid"/>
+                      <a:round/>
+                      <a:headEnd type="none" w="med" len="med"/>
+                      <a:tailEnd type="none" w="med" len="med"/>
+                    </a:lnB>
+                    <a:solidFill>
+                      <a:srgbClr val="F5F7F9"/>
+                    </a:solidFill>
+                  </a:tcPr>
+                </a:tc>
+                <a:tc>
+                  <a:txBody>
+                    <a:bodyPr/>
+                    <a:lstStyle/>
+                    <a:p>
+                      <a:pPr algn="r" indent="0" marL="0">
+                        <a:buNone/>
+                      </a:pPr>
+                      <a:r>
+                        <a:rPr lang="en-US" sz="700" b="1" dirty="0">
+                          <a:solidFill>
+                            <a:srgbClr val="10161F"/>
+                          </a:solidFill>
+                          <a:latin typeface="맑은 고딕" pitchFamily="34" charset="0"/>
+                          <a:ea typeface="맑은 고딕" pitchFamily="34" charset="-122"/>
+                          <a:cs typeface="맑은 고딕" pitchFamily="34" charset="-120"/>
+                        </a:rPr>
+                        <a:t>2,700,000,000</a:t>
+                      </a:r>
+                      <a:endParaRPr lang="en-US" sz="700" dirty="0">
+                        <a:latin typeface="맑은 고딕" charset="0"/>
+                        <a:ea typeface="맑은 고딕" charset="0"/>
+                        <a:cs typeface="맑은 고딕" charset="0"/>
+                      </a:endParaRPr>
+                    </a:p>
+                  </a:txBody>
+                  <a:tcPr marL="50800" marR="50800" marT="25400" marB="25400" anchor="ctr">
+                    <a:lnL w="3810" cap="flat" cmpd="sng" algn="ctr">
+                      <a:solidFill>
+                        <a:srgbClr val="DDE3E8"/>
+                      </a:solidFill>
+                      <a:prstDash val="solid"/>
+                      <a:round/>
+                      <a:headEnd type="none" w="med" len="med"/>
+                      <a:tailEnd type="none" w="med" len="med"/>
+                    </a:lnL>
+                    <a:lnR w="3810" cap="flat" cmpd="sng" algn="ctr">
+                      <a:solidFill>
+                        <a:srgbClr val="DDE3E8"/>
+                      </a:solidFill>
+                      <a:prstDash val="solid"/>
+                      <a:round/>
+                      <a:headEnd type="none" w="med" len="med"/>
+                      <a:tailEnd type="none" w="med" len="med"/>
+                    </a:lnR>
+                    <a:lnT w="3810" cap="flat" cmpd="sng" algn="ctr">
+                      <a:solidFill>
+                        <a:srgbClr val="DDE3E8"/>
+                      </a:solidFill>
+                      <a:prstDash val="solid"/>
+                      <a:round/>
+                      <a:headEnd type="none" w="med" len="med"/>
+                      <a:tailEnd type="none" w="med" len="med"/>
+                    </a:lnT>
+                    <a:lnB w="3810" cap="flat" cmpd="sng" algn="ctr">
+                      <a:solidFill>
+                        <a:srgbClr val="DDE3E8"/>
+                      </a:solidFill>
+                      <a:prstDash val="solid"/>
+                      <a:round/>
+                      <a:headEnd type="none" w="med" len="med"/>
+                      <a:tailEnd type="none" w="med" len="med"/>
+                    </a:lnB>
+                    <a:solidFill>
+                      <a:srgbClr val="F5F7F9"/>
+                    </a:solidFill>
+                  </a:tcPr>
+                </a:tc>
+                <a:tc>
+                  <a:txBody>
+                    <a:bodyPr/>
+                    <a:lstStyle/>
+                    <a:p>
+                      <a:pPr algn="r" indent="0" marL="0">
+                        <a:buNone/>
+                      </a:pPr>
+                      <a:r>
+                        <a:rPr lang="en-US" sz="700" b="1" dirty="0">
+                          <a:solidFill>
+                            <a:srgbClr val="10161F"/>
+                          </a:solidFill>
+                          <a:latin typeface="맑은 고딕" pitchFamily="34" charset="0"/>
+                          <a:ea typeface="맑은 고딕" pitchFamily="34" charset="-122"/>
+                          <a:cs typeface="맑은 고딕" pitchFamily="34" charset="-120"/>
+                        </a:rPr>
+                        <a:t>25,200,000,000</a:t>
+                      </a:r>
+                      <a:endParaRPr lang="en-US" sz="700" dirty="0">
+                        <a:latin typeface="맑은 고딕" charset="0"/>
+                        <a:ea typeface="맑은 고딕" charset="0"/>
+                        <a:cs typeface="맑은 고딕" charset="0"/>
+                      </a:endParaRPr>
+                    </a:p>
+                  </a:txBody>
+                  <a:tcPr marL="50800" marR="50800" marT="25400" marB="25400" anchor="ctr">
+                    <a:lnL w="3810" cap="flat" cmpd="sng" algn="ctr">
+                      <a:solidFill>
+                        <a:srgbClr val="DDE3E8"/>
+                      </a:solidFill>
+                      <a:prstDash val="solid"/>
+                      <a:round/>
+                      <a:headEnd type="none" w="med" len="med"/>
+                      <a:tailEnd type="none" w="med" len="med"/>
+                    </a:lnL>
+                    <a:lnR w="3810" cap="flat" cmpd="sng" algn="ctr">
+                      <a:solidFill>
+                        <a:srgbClr val="DDE3E8"/>
+                      </a:solidFill>
+                      <a:prstDash val="solid"/>
+                      <a:round/>
+                      <a:headEnd type="none" w="med" len="med"/>
+                      <a:tailEnd type="none" w="med" len="med"/>
+                    </a:lnR>
+                    <a:lnT w="3810" cap="flat" cmpd="sng" algn="ctr">
+                      <a:solidFill>
+                        <a:srgbClr val="DDE3E8"/>
+                      </a:solidFill>
+                      <a:prstDash val="solid"/>
+                      <a:round/>
+                      <a:headEnd type="none" w="med" len="med"/>
+                      <a:tailEnd type="none" w="med" len="med"/>
+                    </a:lnT>
+                    <a:lnB w="3810" cap="flat" cmpd="sng" algn="ctr">
+                      <a:solidFill>
+                        <a:srgbClr val="DDE3E8"/>
+                      </a:solidFill>
+                      <a:prstDash val="solid"/>
+                      <a:round/>
+                      <a:headEnd type="none" w="med" len="med"/>
+                      <a:tailEnd type="none" w="med" len="med"/>
+                    </a:lnB>
+                    <a:solidFill>
+                      <a:srgbClr val="F5F7F9"/>
+                    </a:solidFill>
+                  </a:tcPr>
+                </a:tc>
+                <a:tc>
+                  <a:txBody>
+                    <a:bodyPr/>
+                    <a:lstStyle/>
+                    <a:p>
+                      <a:pPr algn="ctr" indent="0" marL="0">
+                        <a:buNone/>
+                      </a:pPr>
+                      <a:r>
+                        <a:rPr lang="en-US" sz="700" b="1" dirty="0">
+                          <a:solidFill>
+                            <a:srgbClr val="10161F"/>
+                          </a:solidFill>
+                          <a:latin typeface="맑은 고딕" pitchFamily="34" charset="0"/>
+                          <a:ea typeface="맑은 고딕" pitchFamily="34" charset="-122"/>
+                          <a:cs typeface="맑은 고딕" pitchFamily="34" charset="-120"/>
+                        </a:rPr>
+                        <a:t>-</a:t>
+                      </a:r>
+                      <a:endParaRPr lang="en-US" sz="700" dirty="0">
+                        <a:latin typeface="맑은 고딕" charset="0"/>
+                        <a:ea typeface="맑은 고딕" charset="0"/>
+                        <a:cs typeface="맑은 고딕" charset="0"/>
+                      </a:endParaRPr>
+                    </a:p>
+                  </a:txBody>
+                  <a:tcPr marL="50800" marR="50800" marT="25400" marB="25400" anchor="ctr">
+                    <a:lnL w="3810" cap="flat" cmpd="sng" algn="ctr">
+                      <a:solidFill>
+                        <a:srgbClr val="DDE3E8"/>
+                      </a:solidFill>
+                      <a:prstDash val="solid"/>
+                      <a:round/>
+                      <a:headEnd type="none" w="med" len="med"/>
+                      <a:tailEnd type="none" w="med" len="med"/>
+                    </a:lnL>
+                    <a:lnR w="3810" cap="flat" cmpd="sng" algn="ctr">
+                      <a:solidFill>
+                        <a:srgbClr val="DDE3E8"/>
+                      </a:solidFill>
+                      <a:prstDash val="solid"/>
+                      <a:round/>
+                      <a:headEnd type="none" w="med" len="med"/>
+                      <a:tailEnd type="none" w="med" len="med"/>
+                    </a:lnR>
+                    <a:lnT w="3810" cap="flat" cmpd="sng" algn="ctr">
+                      <a:solidFill>
+                        <a:srgbClr val="DDE3E8"/>
+                      </a:solidFill>
+                      <a:prstDash val="solid"/>
+                      <a:round/>
+                      <a:headEnd type="none" w="med" len="med"/>
+                      <a:tailEnd type="none" w="med" len="med"/>
+                    </a:lnT>
+                    <a:lnB w="3810" cap="flat" cmpd="sng" algn="ctr">
+                      <a:solidFill>
+                        <a:srgbClr val="DDE3E8"/>
+                      </a:solidFill>
+                      <a:prstDash val="solid"/>
+                      <a:round/>
+                      <a:headEnd type="none" w="med" len="med"/>
+                      <a:tailEnd type="none" w="med" len="med"/>
+                    </a:lnB>
+                    <a:solidFill>
+                      <a:srgbClr val="F5F7F9"/>
                     </a:solidFill>
                   </a:tcPr>
                 </a:tc>
@@ -13299,14 +15300,14 @@
       </p:graphicFrame>
       <p:sp>
         <p:nvSpPr>
-          <p:cNvPr id="8" name="Text 5"/>
+          <p:cNvPr id="49" name="Text 46"/>
           <p:cNvSpPr/>
           <p:nvPr/>
         </p:nvSpPr>
         <p:spPr>
           <a:xfrm>
-            <a:off x="3950208" y="5961888"/>
-            <a:ext cx="7674559" cy="182880"/>
+            <a:off x="2807208" y="5879592"/>
+            <a:ext cx="8817559" cy="164592"/>
           </a:xfrm>
           <a:prstGeom prst="rect">
             <a:avLst/>
@@ -13338,7 +15339,7 @@
       </p:sp>
       <p:sp>
         <p:nvSpPr>
-          <p:cNvPr id="9" name="Text 6"/>
+          <p:cNvPr id="50" name="Text 47"/>
           <p:cNvSpPr/>
           <p:nvPr/>
         </p:nvSpPr>
@@ -13377,7 +15378,7 @@
       </p:sp>
       <p:sp>
         <p:nvSpPr>
-          <p:cNvPr id="10" name="Text 7"/>
+          <p:cNvPr id="51" name="Text 48"/>
           <p:cNvSpPr/>
           <p:nvPr/>
         </p:nvSpPr>
